--- a/AI_Journey.pptx
+++ b/AI_Journey.pptx
@@ -4,6 +4,9 @@
   <p:sldMasterIdLst>
     <p:sldMasterId id="2147483648" r:id="rId1"/>
   </p:sldMasterIdLst>
+  <p:notesMasterIdLst>
+    <p:notesMasterId r:id="rId10"/>
+  </p:notesMasterIdLst>
   <p:sldIdLst>
     <p:sldId id="256" r:id="rId2"/>
     <p:sldId id="257" r:id="rId3"/>
@@ -14,10 +17,7 @@
     <p:sldId id="262" r:id="rId8"/>
     <p:sldId id="263" r:id="rId9"/>
   </p:sldIdLst>
-  <p:notesMasterIdLst>
-    <p:notesMasterId r:id="rId10"/>
-  </p:notesMasterIdLst>
-  <p:sldSz cx="9144000" cy="5143500"/>
+  <p:sldSz cx="9144000" cy="5143500" type="screen16x9"/>
   <p:notesSz cx="5143500" cy="9144000"/>
   <p:defaultTextStyle>
     <a:lvl1pPr marL="0" algn="l" defTabSz="914400" rtl="0" eaLnBrk="1" latinLnBrk="0" hangingPunct="1">
@@ -111,6 +111,11 @@
       </a:defRPr>
     </a:lvl9pPr>
   </p:defaultTextStyle>
+  <p:extLst>
+    <p:ext uri="{EFAFB233-063F-42B5-8137-9DF3F51BA10A}">
+      <p15:sldGuideLst xmlns:p15="http://schemas.microsoft.com/office/powerpoint/2012/main"/>
+    </p:ext>
+  </p:extLst>
 </p:presentation>
 </file>
 
@@ -136,234 +141,10 @@
           <a:chExt cx="0" cy="0"/>
         </a:xfrm>
       </p:grpSpPr>
-      <p:sp>
-        <p:nvSpPr>
-          <p:cNvPr id="2" name="Header Placeholder 1"/>
-          <p:cNvSpPr>
-            <a:spLocks noGrp="1"/>
-          </p:cNvSpPr>
-          <p:nvPr>
-            <p:ph type="hdr" sz="quarter"/>
-          </p:nvPr>
-        </p:nvSpPr>
-        <p:spPr>
-          <a:xfrm>
-            <a:off x="0" y="0"/>
-            <a:ext cx="2971800" cy="458788"/>
-          </a:xfrm>
-          <a:prstGeom prst="rect">
-            <a:avLst/>
-          </a:prstGeom>
-        </p:spPr>
-        <p:txBody>
-          <a:bodyPr vert="horz" lIns="91440" tIns="45720" rIns="91440" bIns="45720" rtlCol="0"/>
-          <a:lstStyle>
-            <a:lvl1pPr algn="l">
-              <a:defRPr sz="1200"/>
-            </a:lvl1pPr>
-          </a:lstStyle>
-          <a:p>
-            <a:endParaRPr lang="en-US"/>
-          </a:p>
-        </p:txBody>
-      </p:sp>
-      <p:sp>
-        <p:nvSpPr>
-          <p:cNvPr id="3" name="Date Placeholder 2"/>
-          <p:cNvSpPr>
-            <a:spLocks noGrp="1"/>
-          </p:cNvSpPr>
-          <p:nvPr>
-            <p:ph type="dt" idx="1"/>
-          </p:nvPr>
-        </p:nvSpPr>
-        <p:spPr>
-          <a:xfrm>
-            <a:off x="3884613" y="0"/>
-            <a:ext cx="2971800" cy="458788"/>
-          </a:xfrm>
-          <a:prstGeom prst="rect">
-            <a:avLst/>
-          </a:prstGeom>
-        </p:spPr>
-        <p:txBody>
-          <a:bodyPr vert="horz" lIns="91440" tIns="45720" rIns="91440" bIns="45720" rtlCol="0"/>
-          <a:lstStyle>
-            <a:lvl1pPr algn="r">
-              <a:defRPr sz="1200"/>
-            </a:lvl1pPr>
-          </a:lstStyle>
-          <a:p>
-            <a:fld id="{5282F153-3F37-0F45-9E97-73ACFA13230C}" type="datetimeFigureOut">
-              <a:rPr lang="en-US"/>
-              <a:t>7/23/19</a:t>
-            </a:fld>
-            <a:endParaRPr lang="en-US"/>
-          </a:p>
-        </p:txBody>
-      </p:sp>
-      <p:sp>
-        <p:nvSpPr>
-          <p:cNvPr id="4" name="Slide Image Placeholder 3"/>
-          <p:cNvSpPr>
-            <a:spLocks noGrp="1" noRot="1" noChangeAspect="1"/>
-          </p:cNvSpPr>
-          <p:nvPr>
-            <p:ph type="sldImg" idx="2"/>
-          </p:nvPr>
-        </p:nvSpPr>
-        <p:spPr>
-          <a:xfrm>
-            <a:off x="685800" y="1143000"/>
-            <a:ext cx="5486400" cy="3086100"/>
-          </a:xfrm>
-          <a:prstGeom prst="rect">
-            <a:avLst/>
-          </a:prstGeom>
-          <a:noFill/>
-          <a:ln w="12700">
-            <a:solidFill>
-              <a:prstClr val="black"/>
-            </a:solidFill>
-          </a:ln>
-        </p:spPr>
-        <p:txBody>
-          <a:bodyPr vert="horz" lIns="91440" tIns="45720" rIns="91440" bIns="45720" rtlCol="0" anchor="ctr"/>
-          <a:lstStyle/>
-          <a:p>
-            <a:endParaRPr lang="en-US"/>
-          </a:p>
-        </p:txBody>
-      </p:sp>
-      <p:sp>
-        <p:nvSpPr>
-          <p:cNvPr id="5" name="Notes Placeholder 4"/>
-          <p:cNvSpPr>
-            <a:spLocks noGrp="1"/>
-          </p:cNvSpPr>
-          <p:nvPr>
-            <p:ph type="body" sz="quarter" idx="3"/>
-          </p:nvPr>
-        </p:nvSpPr>
-        <p:spPr>
-          <a:xfrm>
-            <a:off x="685800" y="4400550"/>
-            <a:ext cx="5486400" cy="3600450"/>
-          </a:xfrm>
-          <a:prstGeom prst="rect">
-            <a:avLst/>
-          </a:prstGeom>
-        </p:spPr>
-        <p:txBody>
-          <a:bodyPr vert="horz" lIns="91440" tIns="45720" rIns="91440" bIns="45720" rtlCol="0"/>
-          <a:lstStyle/>
-          <a:p>
-            <a:pPr lvl="0"/>
-            <a:r>
-              <a:rPr lang="en-US"/>
-              <a:t>Click to edit Master text styles</a:t>
-            </a:r>
-          </a:p>
-          <a:p>
-            <a:pPr lvl="1"/>
-            <a:r>
-              <a:rPr lang="en-US"/>
-              <a:t>Second level</a:t>
-            </a:r>
-          </a:p>
-          <a:p>
-            <a:pPr lvl="2"/>
-            <a:r>
-              <a:rPr lang="en-US"/>
-              <a:t>Third level</a:t>
-            </a:r>
-          </a:p>
-          <a:p>
-            <a:pPr lvl="3"/>
-            <a:r>
-              <a:rPr lang="en-US"/>
-              <a:t>Fourth level</a:t>
-            </a:r>
-          </a:p>
-          <a:p>
-            <a:pPr lvl="4"/>
-            <a:r>
-              <a:rPr lang="en-US"/>
-              <a:t>Fifth level</a:t>
-            </a:r>
-          </a:p>
-        </p:txBody>
-      </p:sp>
-      <p:sp>
-        <p:nvSpPr>
-          <p:cNvPr id="6" name="Footer Placeholder 5"/>
-          <p:cNvSpPr>
-            <a:spLocks noGrp="1"/>
-          </p:cNvSpPr>
-          <p:nvPr>
-            <p:ph type="ftr" sz="quarter" idx="4"/>
-          </p:nvPr>
-        </p:nvSpPr>
-        <p:spPr>
-          <a:xfrm>
-            <a:off x="0" y="8685213"/>
-            <a:ext cx="2971800" cy="458787"/>
-          </a:xfrm>
-          <a:prstGeom prst="rect">
-            <a:avLst/>
-          </a:prstGeom>
-        </p:spPr>
-        <p:txBody>
-          <a:bodyPr vert="horz" lIns="91440" tIns="45720" rIns="91440" bIns="45720" rtlCol="0" anchor="b"/>
-          <a:lstStyle>
-            <a:lvl1pPr algn="l">
-              <a:defRPr sz="1200"/>
-            </a:lvl1pPr>
-          </a:lstStyle>
-          <a:p>
-            <a:endParaRPr lang="en-US"/>
-          </a:p>
-        </p:txBody>
-      </p:sp>
-      <p:sp>
-        <p:nvSpPr>
-          <p:cNvPr id="7" name="Slide Number Placeholder 6"/>
-          <p:cNvSpPr>
-            <a:spLocks noGrp="1"/>
-          </p:cNvSpPr>
-          <p:nvPr>
-            <p:ph type="sldNum" sz="quarter" idx="5"/>
-          </p:nvPr>
-        </p:nvSpPr>
-        <p:spPr>
-          <a:xfrm>
-            <a:off x="3884613" y="8685213"/>
-            <a:ext cx="2971800" cy="458787"/>
-          </a:xfrm>
-          <a:prstGeom prst="rect">
-            <a:avLst/>
-          </a:prstGeom>
-        </p:spPr>
-        <p:txBody>
-          <a:bodyPr vert="horz" lIns="91440" tIns="45720" rIns="91440" bIns="45720" rtlCol="0" anchor="b"/>
-          <a:lstStyle>
-            <a:lvl1pPr algn="r">
-              <a:defRPr sz="1200"/>
-            </a:lvl1pPr>
-          </a:lstStyle>
-          <a:p>
-            <a:fld id="{CE5E9CC1-C706-0F49-92D6-E571CC5EEA8F}" type="slidenum">
-              <a:rPr lang="en-US"/>
-              <a:t>‹#›</a:t>
-            </a:fld>
-            <a:endParaRPr lang="en-US"/>
-          </a:p>
-        </p:txBody>
-      </p:sp>
     </p:spTree>
     <p:extLst>
       <p:ext uri="{BB962C8B-B14F-4D97-AF65-F5344CB8AC3E}">
-        <p14:creationId xmlns:p14="http://schemas.microsoft.com/office/powerpoint/2010/main" val="1024086991"/>
+        <p14:creationId xmlns:p14="http://schemas.microsoft.com/office/powerpoint/2010/main" val="2449171230"/>
       </p:ext>
     </p:extLst>
   </p:cSld>
@@ -507,10 +288,6 @@
           <a:bodyPr/>
           <a:lstStyle/>
           <a:p>
-            <a:r>
-              <a:rPr lang="en-US" dirty="0"/>
-              <a:t/>
-            </a:r>
             <a:endParaRPr lang="en-US" dirty="0"/>
           </a:p>
         </p:txBody>
@@ -595,10 +372,6 @@
           <a:bodyPr/>
           <a:lstStyle/>
           <a:p>
-            <a:r>
-              <a:rPr lang="en-US" dirty="0"/>
-              <a:t/>
-            </a:r>
             <a:endParaRPr lang="en-US" dirty="0"/>
           </a:p>
         </p:txBody>
@@ -683,10 +456,6 @@
           <a:bodyPr/>
           <a:lstStyle/>
           <a:p>
-            <a:r>
-              <a:rPr lang="en-US" dirty="0"/>
-              <a:t/>
-            </a:r>
             <a:endParaRPr lang="en-US" dirty="0"/>
           </a:p>
         </p:txBody>
@@ -771,10 +540,6 @@
           <a:bodyPr/>
           <a:lstStyle/>
           <a:p>
-            <a:r>
-              <a:rPr lang="en-US" dirty="0"/>
-              <a:t/>
-            </a:r>
             <a:endParaRPr lang="en-US" dirty="0"/>
           </a:p>
         </p:txBody>
@@ -859,10 +624,6 @@
           <a:bodyPr/>
           <a:lstStyle/>
           <a:p>
-            <a:r>
-              <a:rPr lang="en-US" dirty="0"/>
-              <a:t/>
-            </a:r>
             <a:endParaRPr lang="en-US" dirty="0"/>
           </a:p>
         </p:txBody>
@@ -947,10 +708,6 @@
           <a:bodyPr/>
           <a:lstStyle/>
           <a:p>
-            <a:r>
-              <a:rPr lang="en-US" dirty="0"/>
-              <a:t/>
-            </a:r>
             <a:endParaRPr lang="en-US" dirty="0"/>
           </a:p>
         </p:txBody>
@@ -1035,10 +792,6 @@
           <a:bodyPr/>
           <a:lstStyle/>
           <a:p>
-            <a:r>
-              <a:rPr lang="en-US" dirty="0"/>
-              <a:t/>
-            </a:r>
             <a:endParaRPr lang="en-US" dirty="0"/>
           </a:p>
         </p:txBody>
@@ -1123,10 +876,6 @@
           <a:bodyPr/>
           <a:lstStyle/>
           <a:p>
-            <a:r>
-              <a:rPr lang="en-US" dirty="0"/>
-              <a:t/>
-            </a:r>
             <a:endParaRPr lang="en-US" dirty="0"/>
           </a:p>
         </p:txBody>
@@ -1200,6 +949,11 @@
 <file path=ppt/slideMasters/slideMaster1.xml><?xml version="1.0" encoding="utf-8"?>
 <p:sldMaster xmlns:a="http://schemas.openxmlformats.org/drawingml/2006/main" xmlns:r="http://schemas.openxmlformats.org/officeDocument/2006/relationships" xmlns:p="http://schemas.openxmlformats.org/presentationml/2006/main">
   <p:cSld>
+    <p:bg>
+      <p:bgRef idx="1001">
+        <a:schemeClr val="bg1"/>
+      </p:bgRef>
+    </p:bg>
     <p:spTree>
       <p:nvGrpSpPr>
         <p:cNvPr id="1" name=""/>
@@ -1482,6 +1236,7 @@
         <a:solidFill>
           <a:srgbClr val="0D1B2A"/>
         </a:solidFill>
+        <a:effectLst/>
       </p:bgPr>
     </p:bg>
     <p:spTree>
@@ -1522,6 +1277,13 @@
             <a:prstDash val="solid"/>
           </a:ln>
         </p:spPr>
+        <p:txBody>
+          <a:bodyPr/>
+          <a:lstStyle/>
+          <a:p>
+            <a:endParaRPr lang="en-GB"/>
+          </a:p>
+        </p:txBody>
       </p:sp>
       <p:sp>
         <p:nvSpPr>
@@ -1547,6 +1309,13 @@
             <a:prstDash val="solid"/>
           </a:ln>
         </p:spPr>
+        <p:txBody>
+          <a:bodyPr/>
+          <a:lstStyle/>
+          <a:p>
+            <a:endParaRPr lang="en-GB"/>
+          </a:p>
+        </p:txBody>
       </p:sp>
       <p:sp>
         <p:nvSpPr>
@@ -1576,6 +1345,13 @@
             <a:prstDash val="solid"/>
           </a:ln>
         </p:spPr>
+        <p:txBody>
+          <a:bodyPr/>
+          <a:lstStyle/>
+          <a:p>
+            <a:endParaRPr lang="en-GB"/>
+          </a:p>
+        </p:txBody>
       </p:sp>
       <p:sp>
         <p:nvSpPr>
@@ -1605,6 +1381,13 @@
             <a:prstDash val="solid"/>
           </a:ln>
         </p:spPr>
+        <p:txBody>
+          <a:bodyPr/>
+          <a:lstStyle/>
+          <a:p>
+            <a:endParaRPr lang="en-GB"/>
+          </a:p>
+        </p:txBody>
       </p:sp>
       <p:sp>
         <p:nvSpPr>
@@ -1634,6 +1417,13 @@
             <a:prstDash val="solid"/>
           </a:ln>
         </p:spPr>
+        <p:txBody>
+          <a:bodyPr/>
+          <a:lstStyle/>
+          <a:p>
+            <a:endParaRPr lang="en-GB"/>
+          </a:p>
+        </p:txBody>
       </p:sp>
       <p:sp>
         <p:nvSpPr>
@@ -1656,7 +1446,7 @@
           <a:bodyPr wrap="square" rtlCol="0" anchor="ctr"/>
           <a:lstStyle/>
           <a:p>
-            <a:pPr algn="ctr" indent="0" marL="0">
+            <a:pPr marL="0" indent="0" algn="ctr">
               <a:buNone/>
             </a:pPr>
             <a:r>
@@ -1697,7 +1487,7 @@
           <a:bodyPr wrap="square" lIns="0" tIns="0" rIns="0" bIns="0" rtlCol="0" anchor="ctr"/>
           <a:lstStyle/>
           <a:p>
-            <a:pPr algn="l" indent="0" marL="0">
+            <a:pPr marL="0" indent="0" algn="l">
               <a:buNone/>
             </a:pPr>
             <a:r>
@@ -1709,7 +1499,7 @@
                 <a:ea typeface="Calibri" pitchFamily="34" charset="-122"/>
                 <a:cs typeface="Calibri" pitchFamily="34" charset="-120"/>
               </a:rPr>
-              <a:t>My Journey into AI</a:t>
+              <a:t>AI – Falling down the rabbit hole</a:t>
             </a:r>
             <a:endParaRPr lang="en-US" sz="4000" dirty="0"/>
           </a:p>
@@ -1736,7 +1526,7 @@
           <a:bodyPr wrap="square" lIns="0" tIns="0" rIns="0" bIns="0" rtlCol="0" anchor="ctr"/>
           <a:lstStyle/>
           <a:p>
-            <a:pPr algn="l" indent="0" marL="0">
+            <a:pPr marL="0" indent="0" algn="l">
               <a:buNone/>
             </a:pPr>
             <a:r>
@@ -1778,6 +1568,13 @@
             <a:prstDash val="solid"/>
           </a:ln>
         </p:spPr>
+        <p:txBody>
+          <a:bodyPr/>
+          <a:lstStyle/>
+          <a:p>
+            <a:endParaRPr lang="en-GB"/>
+          </a:p>
+        </p:txBody>
       </p:sp>
       <p:sp>
         <p:nvSpPr>
@@ -1800,7 +1597,7 @@
           <a:bodyPr wrap="square" lIns="0" tIns="0" rIns="0" bIns="0" rtlCol="0" anchor="ctr"/>
           <a:lstStyle/>
           <a:p>
-            <a:pPr algn="l" indent="0" marL="0">
+            <a:pPr marL="0" indent="0" algn="l">
               <a:buNone/>
             </a:pPr>
             <a:r>
@@ -1842,6 +1639,13 @@
             <a:prstDash val="solid"/>
           </a:ln>
         </p:spPr>
+        <p:txBody>
+          <a:bodyPr/>
+          <a:lstStyle/>
+          <a:p>
+            <a:endParaRPr lang="en-GB"/>
+          </a:p>
+        </p:txBody>
       </p:sp>
       <p:sp>
         <p:nvSpPr>
@@ -1864,7 +1668,7 @@
           <a:bodyPr wrap="square" lIns="0" tIns="0" rIns="0" bIns="0" rtlCol="0" anchor="ctr"/>
           <a:lstStyle/>
           <a:p>
-            <a:pPr algn="l" indent="0" marL="0">
+            <a:pPr marL="0" indent="0" algn="l">
               <a:buNone/>
             </a:pPr>
             <a:r>
@@ -1898,6 +1702,7 @@
         <a:solidFill>
           <a:srgbClr val="0D1B2A"/>
         </a:solidFill>
+        <a:effectLst/>
       </p:bgPr>
     </p:bg>
     <p:spTree>
@@ -1938,6 +1743,13 @@
             <a:prstDash val="solid"/>
           </a:ln>
         </p:spPr>
+        <p:txBody>
+          <a:bodyPr/>
+          <a:lstStyle/>
+          <a:p>
+            <a:endParaRPr lang="en-GB"/>
+          </a:p>
+        </p:txBody>
       </p:sp>
       <p:sp>
         <p:nvSpPr>
@@ -1963,6 +1775,13 @@
             <a:prstDash val="solid"/>
           </a:ln>
         </p:spPr>
+        <p:txBody>
+          <a:bodyPr/>
+          <a:lstStyle/>
+          <a:p>
+            <a:endParaRPr lang="en-GB"/>
+          </a:p>
+        </p:txBody>
       </p:sp>
       <p:sp>
         <p:nvSpPr>
@@ -1988,6 +1807,13 @@
             <a:prstDash val="solid"/>
           </a:ln>
         </p:spPr>
+        <p:txBody>
+          <a:bodyPr/>
+          <a:lstStyle/>
+          <a:p>
+            <a:endParaRPr lang="en-GB"/>
+          </a:p>
+        </p:txBody>
       </p:sp>
       <p:sp>
         <p:nvSpPr>
@@ -2010,7 +1836,7 @@
           <a:bodyPr wrap="square" lIns="0" tIns="0" rIns="0" bIns="0" rtlCol="0" anchor="ctr"/>
           <a:lstStyle/>
           <a:p>
-            <a:pPr algn="ctr" indent="0" marL="0">
+            <a:pPr marL="0" indent="0" algn="ctr">
               <a:buNone/>
             </a:pPr>
             <a:r>
@@ -2049,7 +1875,7 @@
           <a:bodyPr wrap="square" lIns="0" tIns="0" rIns="0" bIns="0" rtlCol="0" anchor="ctr"/>
           <a:lstStyle/>
           <a:p>
-            <a:pPr algn="l" indent="0" marL="0">
+            <a:pPr marL="0" indent="0" algn="l">
               <a:buNone/>
             </a:pPr>
             <a:r>
@@ -2088,7 +1914,7 @@
           <a:bodyPr wrap="square" lIns="0" tIns="0" rIns="0" bIns="0" rtlCol="0" anchor="ctr"/>
           <a:lstStyle/>
           <a:p>
-            <a:pPr algn="r" indent="0" marL="0">
+            <a:pPr marL="0" indent="0" algn="r">
               <a:buNone/>
             </a:pPr>
             <a:r>
@@ -2132,13 +1958,20 @@
             <a:prstDash val="solid"/>
           </a:ln>
           <a:effectLst>
-            <a:outerShdw sx="100000" sy="100000" kx="0" ky="0" algn="bl" rotWithShape="0" blurRad="101600" dist="38100" dir="8100000">
+            <a:outerShdw blurRad="101600" dist="38100" dir="8100000" algn="bl" rotWithShape="0">
               <a:srgbClr val="000000">
                 <a:alpha val="25000"/>
               </a:srgbClr>
             </a:outerShdw>
           </a:effectLst>
         </p:spPr>
+        <p:txBody>
+          <a:bodyPr/>
+          <a:lstStyle/>
+          <a:p>
+            <a:endParaRPr lang="en-GB"/>
+          </a:p>
+        </p:txBody>
       </p:sp>
       <p:sp>
         <p:nvSpPr>
@@ -2164,6 +1997,13 @@
             <a:prstDash val="solid"/>
           </a:ln>
         </p:spPr>
+        <p:txBody>
+          <a:bodyPr/>
+          <a:lstStyle/>
+          <a:p>
+            <a:endParaRPr lang="en-GB"/>
+          </a:p>
+        </p:txBody>
       </p:sp>
       <p:sp>
         <p:nvSpPr>
@@ -2186,7 +2026,7 @@
           <a:bodyPr wrap="square" lIns="0" tIns="0" rIns="0" bIns="0" rtlCol="0" anchor="ctr"/>
           <a:lstStyle/>
           <a:p>
-            <a:pPr algn="l" indent="0" marL="0">
+            <a:pPr marL="0" indent="0" algn="l">
               <a:buNone/>
             </a:pPr>
             <a:r>
@@ -2225,7 +2065,7 @@
           <a:bodyPr wrap="square" lIns="0" tIns="0" rIns="0" bIns="0" rtlCol="0" anchor="ctr"/>
           <a:lstStyle/>
           <a:p>
-            <a:pPr algn="l" indent="0" marL="0">
+            <a:pPr marL="0" indent="0" algn="l">
               <a:buNone/>
             </a:pPr>
             <a:r>
@@ -2269,13 +2109,20 @@
             <a:prstDash val="solid"/>
           </a:ln>
           <a:effectLst>
-            <a:outerShdw sx="100000" sy="100000" kx="0" ky="0" algn="bl" rotWithShape="0" blurRad="101600" dist="38100" dir="8100000">
+            <a:outerShdw blurRad="101600" dist="38100" dir="8100000" algn="bl" rotWithShape="0">
               <a:srgbClr val="000000">
                 <a:alpha val="25000"/>
               </a:srgbClr>
             </a:outerShdw>
           </a:effectLst>
         </p:spPr>
+        <p:txBody>
+          <a:bodyPr/>
+          <a:lstStyle/>
+          <a:p>
+            <a:endParaRPr lang="en-GB"/>
+          </a:p>
+        </p:txBody>
       </p:sp>
       <p:sp>
         <p:nvSpPr>
@@ -2301,6 +2148,13 @@
             <a:prstDash val="solid"/>
           </a:ln>
         </p:spPr>
+        <p:txBody>
+          <a:bodyPr/>
+          <a:lstStyle/>
+          <a:p>
+            <a:endParaRPr lang="en-GB"/>
+          </a:p>
+        </p:txBody>
       </p:sp>
       <p:sp>
         <p:nvSpPr>
@@ -2323,7 +2177,7 @@
           <a:bodyPr wrap="square" lIns="0" tIns="0" rIns="0" bIns="0" rtlCol="0" anchor="ctr"/>
           <a:lstStyle/>
           <a:p>
-            <a:pPr algn="l" indent="0" marL="0">
+            <a:pPr marL="0" indent="0" algn="l">
               <a:buNone/>
             </a:pPr>
             <a:r>
@@ -2362,7 +2216,7 @@
           <a:bodyPr wrap="square" lIns="0" tIns="0" rIns="0" bIns="0" rtlCol="0" anchor="ctr"/>
           <a:lstStyle/>
           <a:p>
-            <a:pPr algn="l" indent="0" marL="0">
+            <a:pPr marL="0" indent="0" algn="l">
               <a:buNone/>
             </a:pPr>
             <a:r>
@@ -2406,13 +2260,20 @@
             <a:prstDash val="solid"/>
           </a:ln>
           <a:effectLst>
-            <a:outerShdw sx="100000" sy="100000" kx="0" ky="0" algn="bl" rotWithShape="0" blurRad="101600" dist="38100" dir="8100000">
+            <a:outerShdw blurRad="101600" dist="38100" dir="8100000" algn="bl" rotWithShape="0">
               <a:srgbClr val="000000">
                 <a:alpha val="25000"/>
               </a:srgbClr>
             </a:outerShdw>
           </a:effectLst>
         </p:spPr>
+        <p:txBody>
+          <a:bodyPr/>
+          <a:lstStyle/>
+          <a:p>
+            <a:endParaRPr lang="en-GB"/>
+          </a:p>
+        </p:txBody>
       </p:sp>
       <p:sp>
         <p:nvSpPr>
@@ -2438,6 +2299,13 @@
             <a:prstDash val="solid"/>
           </a:ln>
         </p:spPr>
+        <p:txBody>
+          <a:bodyPr/>
+          <a:lstStyle/>
+          <a:p>
+            <a:endParaRPr lang="en-GB"/>
+          </a:p>
+        </p:txBody>
       </p:sp>
       <p:sp>
         <p:nvSpPr>
@@ -2460,7 +2328,7 @@
           <a:bodyPr wrap="square" lIns="0" tIns="0" rIns="0" bIns="0" rtlCol="0" anchor="ctr"/>
           <a:lstStyle/>
           <a:p>
-            <a:pPr algn="l" indent="0" marL="0">
+            <a:pPr marL="0" indent="0" algn="l">
               <a:buNone/>
             </a:pPr>
             <a:r>
@@ -2499,7 +2367,7 @@
           <a:bodyPr wrap="square" lIns="0" tIns="0" rIns="0" bIns="0" rtlCol="0" anchor="ctr"/>
           <a:lstStyle/>
           <a:p>
-            <a:pPr algn="l" indent="0" marL="0">
+            <a:pPr marL="0" indent="0" algn="l">
               <a:buNone/>
             </a:pPr>
             <a:r>
@@ -2543,13 +2411,20 @@
             <a:prstDash val="solid"/>
           </a:ln>
           <a:effectLst>
-            <a:outerShdw sx="100000" sy="100000" kx="0" ky="0" algn="bl" rotWithShape="0" blurRad="101600" dist="38100" dir="8100000">
+            <a:outerShdw blurRad="101600" dist="38100" dir="8100000" algn="bl" rotWithShape="0">
               <a:srgbClr val="000000">
                 <a:alpha val="25000"/>
               </a:srgbClr>
             </a:outerShdw>
           </a:effectLst>
         </p:spPr>
+        <p:txBody>
+          <a:bodyPr/>
+          <a:lstStyle/>
+          <a:p>
+            <a:endParaRPr lang="en-GB"/>
+          </a:p>
+        </p:txBody>
       </p:sp>
       <p:sp>
         <p:nvSpPr>
@@ -2575,6 +2450,13 @@
             <a:prstDash val="solid"/>
           </a:ln>
         </p:spPr>
+        <p:txBody>
+          <a:bodyPr/>
+          <a:lstStyle/>
+          <a:p>
+            <a:endParaRPr lang="en-GB"/>
+          </a:p>
+        </p:txBody>
       </p:sp>
       <p:sp>
         <p:nvSpPr>
@@ -2597,7 +2479,7 @@
           <a:bodyPr wrap="square" lIns="0" tIns="0" rIns="0" bIns="0" rtlCol="0" anchor="ctr"/>
           <a:lstStyle/>
           <a:p>
-            <a:pPr algn="l" indent="0" marL="0">
+            <a:pPr marL="0" indent="0" algn="l">
               <a:buNone/>
             </a:pPr>
             <a:r>
@@ -2636,7 +2518,7 @@
           <a:bodyPr wrap="square" lIns="0" tIns="0" rIns="0" bIns="0" rtlCol="0" anchor="ctr"/>
           <a:lstStyle/>
           <a:p>
-            <a:pPr algn="l" indent="0" marL="0">
+            <a:pPr marL="0" indent="0" algn="l">
               <a:buNone/>
             </a:pPr>
             <a:r>
@@ -2680,13 +2562,20 @@
             <a:prstDash val="solid"/>
           </a:ln>
           <a:effectLst>
-            <a:outerShdw sx="100000" sy="100000" kx="0" ky="0" algn="bl" rotWithShape="0" blurRad="101600" dist="38100" dir="8100000">
+            <a:outerShdw blurRad="101600" dist="38100" dir="8100000" algn="bl" rotWithShape="0">
               <a:srgbClr val="000000">
                 <a:alpha val="25000"/>
               </a:srgbClr>
             </a:outerShdw>
           </a:effectLst>
         </p:spPr>
+        <p:txBody>
+          <a:bodyPr/>
+          <a:lstStyle/>
+          <a:p>
+            <a:endParaRPr lang="en-GB"/>
+          </a:p>
+        </p:txBody>
       </p:sp>
       <p:sp>
         <p:nvSpPr>
@@ -2712,6 +2601,13 @@
             <a:prstDash val="solid"/>
           </a:ln>
         </p:spPr>
+        <p:txBody>
+          <a:bodyPr/>
+          <a:lstStyle/>
+          <a:p>
+            <a:endParaRPr lang="en-GB"/>
+          </a:p>
+        </p:txBody>
       </p:sp>
       <p:sp>
         <p:nvSpPr>
@@ -2734,7 +2630,7 @@
           <a:bodyPr wrap="square" lIns="0" tIns="0" rIns="0" bIns="0" rtlCol="0" anchor="ctr"/>
           <a:lstStyle/>
           <a:p>
-            <a:pPr algn="l" indent="0" marL="0">
+            <a:pPr marL="0" indent="0" algn="l">
               <a:buNone/>
             </a:pPr>
             <a:r>
@@ -2773,7 +2669,7 @@
           <a:bodyPr wrap="square" lIns="0" tIns="0" rIns="0" bIns="0" rtlCol="0" anchor="ctr"/>
           <a:lstStyle/>
           <a:p>
-            <a:pPr algn="l" indent="0" marL="0">
+            <a:pPr marL="0" indent="0" algn="l">
               <a:buNone/>
             </a:pPr>
             <a:r>
@@ -2815,13 +2711,20 @@
             <a:prstDash val="solid"/>
           </a:ln>
           <a:effectLst>
-            <a:outerShdw sx="100000" sy="100000" kx="0" ky="0" algn="bl" rotWithShape="0" blurRad="101600" dist="38100" dir="8100000">
+            <a:outerShdw blurRad="101600" dist="38100" dir="8100000" algn="bl" rotWithShape="0">
               <a:srgbClr val="000000">
                 <a:alpha val="25000"/>
               </a:srgbClr>
             </a:outerShdw>
           </a:effectLst>
         </p:spPr>
+        <p:txBody>
+          <a:bodyPr/>
+          <a:lstStyle/>
+          <a:p>
+            <a:endParaRPr lang="en-GB"/>
+          </a:p>
+        </p:txBody>
       </p:sp>
       <p:sp>
         <p:nvSpPr>
@@ -2844,7 +2747,7 @@
           <a:bodyPr wrap="square" lIns="0" tIns="0" rIns="0" bIns="0" rtlCol="0" anchor="ctr"/>
           <a:lstStyle/>
           <a:p>
-            <a:pPr algn="ctr" indent="0" marL="0">
+            <a:pPr marL="0" indent="0" algn="ctr">
               <a:buNone/>
             </a:pPr>
             <a:r>
@@ -2880,7 +2783,7 @@
           <a:bodyPr wrap="square" lIns="0" tIns="0" rIns="0" bIns="0" rtlCol="0" anchor="ctr"/>
           <a:lstStyle/>
           <a:p>
-            <a:pPr algn="ctr" indent="0" marL="0">
+            <a:pPr marL="0" indent="0" algn="ctr">
               <a:buNone/>
             </a:pPr>
             <a:r>
@@ -2919,7 +2822,7 @@
           <a:bodyPr wrap="square" lIns="0" tIns="0" rIns="0" bIns="0" rtlCol="0" anchor="ctr"/>
           <a:lstStyle/>
           <a:p>
-            <a:pPr algn="ctr" indent="0" marL="0">
+            <a:pPr marL="0" indent="0" algn="ctr">
               <a:buNone/>
             </a:pPr>
             <a:r>
@@ -2961,6 +2864,13 @@
             <a:prstDash val="solid"/>
           </a:ln>
         </p:spPr>
+        <p:txBody>
+          <a:bodyPr/>
+          <a:lstStyle/>
+          <a:p>
+            <a:endParaRPr lang="en-GB"/>
+          </a:p>
+        </p:txBody>
       </p:sp>
       <p:sp>
         <p:nvSpPr>
@@ -2983,7 +2893,7 @@
           <a:bodyPr wrap="square" lIns="0" tIns="0" rIns="0" bIns="0" rtlCol="0" anchor="ctr"/>
           <a:lstStyle/>
           <a:p>
-            <a:pPr algn="l" indent="0" marL="0">
+            <a:pPr marL="0" indent="0" algn="l">
               <a:buNone/>
             </a:pPr>
             <a:r>
@@ -3017,6 +2927,7 @@
         <a:solidFill>
           <a:srgbClr val="0D1B2A"/>
         </a:solidFill>
+        <a:effectLst/>
       </p:bgPr>
     </p:bg>
     <p:spTree>
@@ -3057,6 +2968,13 @@
             <a:prstDash val="solid"/>
           </a:ln>
         </p:spPr>
+        <p:txBody>
+          <a:bodyPr/>
+          <a:lstStyle/>
+          <a:p>
+            <a:endParaRPr lang="en-GB"/>
+          </a:p>
+        </p:txBody>
       </p:sp>
       <p:sp>
         <p:nvSpPr>
@@ -3082,6 +3000,13 @@
             <a:prstDash val="solid"/>
           </a:ln>
         </p:spPr>
+        <p:txBody>
+          <a:bodyPr/>
+          <a:lstStyle/>
+          <a:p>
+            <a:endParaRPr lang="en-GB"/>
+          </a:p>
+        </p:txBody>
       </p:sp>
       <p:sp>
         <p:nvSpPr>
@@ -3107,6 +3032,13 @@
             <a:prstDash val="solid"/>
           </a:ln>
         </p:spPr>
+        <p:txBody>
+          <a:bodyPr/>
+          <a:lstStyle/>
+          <a:p>
+            <a:endParaRPr lang="en-GB"/>
+          </a:p>
+        </p:txBody>
       </p:sp>
       <p:sp>
         <p:nvSpPr>
@@ -3129,7 +3061,7 @@
           <a:bodyPr wrap="square" lIns="0" tIns="0" rIns="0" bIns="0" rtlCol="0" anchor="ctr"/>
           <a:lstStyle/>
           <a:p>
-            <a:pPr algn="ctr" indent="0" marL="0">
+            <a:pPr marL="0" indent="0" algn="ctr">
               <a:buNone/>
             </a:pPr>
             <a:r>
@@ -3168,7 +3100,7 @@
           <a:bodyPr wrap="square" lIns="0" tIns="0" rIns="0" bIns="0" rtlCol="0" anchor="ctr"/>
           <a:lstStyle/>
           <a:p>
-            <a:pPr algn="l" indent="0" marL="0">
+            <a:pPr marL="0" indent="0" algn="l">
               <a:buNone/>
             </a:pPr>
             <a:r>
@@ -3207,7 +3139,7 @@
           <a:bodyPr wrap="square" lIns="0" tIns="0" rIns="0" bIns="0" rtlCol="0" anchor="ctr"/>
           <a:lstStyle/>
           <a:p>
-            <a:pPr algn="r" indent="0" marL="0">
+            <a:pPr marL="0" indent="0" algn="r">
               <a:buNone/>
             </a:pPr>
             <a:r>
@@ -3246,11 +3178,11 @@
           <a:bodyPr wrap="square" lIns="0" tIns="0" rIns="0" bIns="0" rtlCol="0" anchor="ctr"/>
           <a:lstStyle/>
           <a:p>
-            <a:pPr algn="l" indent="0" marL="0">
+            <a:pPr marL="0" indent="0" algn="l">
               <a:buNone/>
             </a:pPr>
             <a:r>
-              <a:rPr lang="en-US" sz="900" b="1" spc="300" kern="0" dirty="0">
+              <a:rPr lang="en-US" sz="900" b="1" kern="0" spc="300" dirty="0">
                 <a:solidFill>
                   <a:srgbClr val="7A9AB8"/>
                 </a:solidFill>
@@ -3288,13 +3220,20 @@
             <a:prstDash val="solid"/>
           </a:ln>
           <a:effectLst>
-            <a:outerShdw sx="100000" sy="100000" kx="0" ky="0" algn="bl" rotWithShape="0" blurRad="101600" dist="38100" dir="8100000">
+            <a:outerShdw blurRad="101600" dist="38100" dir="8100000" algn="bl" rotWithShape="0">
               <a:srgbClr val="000000">
                 <a:alpha val="25000"/>
               </a:srgbClr>
             </a:outerShdw>
           </a:effectLst>
         </p:spPr>
+        <p:txBody>
+          <a:bodyPr/>
+          <a:lstStyle/>
+          <a:p>
+            <a:endParaRPr lang="en-GB"/>
+          </a:p>
+        </p:txBody>
       </p:sp>
       <p:sp>
         <p:nvSpPr>
@@ -3320,6 +3259,13 @@
             <a:prstDash val="solid"/>
           </a:ln>
         </p:spPr>
+        <p:txBody>
+          <a:bodyPr/>
+          <a:lstStyle/>
+          <a:p>
+            <a:endParaRPr lang="en-GB"/>
+          </a:p>
+        </p:txBody>
       </p:sp>
       <p:sp>
         <p:nvSpPr>
@@ -3342,7 +3288,7 @@
           <a:bodyPr wrap="square" lIns="0" tIns="0" rIns="0" bIns="0" rtlCol="0" anchor="ctr"/>
           <a:lstStyle/>
           <a:p>
-            <a:pPr algn="ctr" indent="0" marL="0">
+            <a:pPr marL="0" indent="0" algn="ctr">
               <a:buNone/>
             </a:pPr>
             <a:r>
@@ -3381,7 +3327,7 @@
           <a:bodyPr wrap="square" lIns="0" tIns="0" rIns="0" bIns="0" rtlCol="0" anchor="ctr"/>
           <a:lstStyle/>
           <a:p>
-            <a:pPr algn="l" indent="0" marL="0">
+            <a:pPr marL="0" indent="0" algn="l">
               <a:buNone/>
             </a:pPr>
             <a:r>
@@ -3423,13 +3369,20 @@
             <a:prstDash val="solid"/>
           </a:ln>
           <a:effectLst>
-            <a:outerShdw sx="100000" sy="100000" kx="0" ky="0" algn="bl" rotWithShape="0" blurRad="101600" dist="38100" dir="8100000">
+            <a:outerShdw blurRad="101600" dist="38100" dir="8100000" algn="bl" rotWithShape="0">
               <a:srgbClr val="000000">
                 <a:alpha val="25000"/>
               </a:srgbClr>
             </a:outerShdw>
           </a:effectLst>
         </p:spPr>
+        <p:txBody>
+          <a:bodyPr/>
+          <a:lstStyle/>
+          <a:p>
+            <a:endParaRPr lang="en-GB"/>
+          </a:p>
+        </p:txBody>
       </p:sp>
       <p:sp>
         <p:nvSpPr>
@@ -3455,6 +3408,13 @@
             <a:prstDash val="solid"/>
           </a:ln>
         </p:spPr>
+        <p:txBody>
+          <a:bodyPr/>
+          <a:lstStyle/>
+          <a:p>
+            <a:endParaRPr lang="en-GB"/>
+          </a:p>
+        </p:txBody>
       </p:sp>
       <p:sp>
         <p:nvSpPr>
@@ -3477,7 +3437,7 @@
           <a:bodyPr wrap="square" lIns="0" tIns="0" rIns="0" bIns="0" rtlCol="0" anchor="ctr"/>
           <a:lstStyle/>
           <a:p>
-            <a:pPr algn="ctr" indent="0" marL="0">
+            <a:pPr marL="0" indent="0" algn="ctr">
               <a:buNone/>
             </a:pPr>
             <a:r>
@@ -3516,7 +3476,7 @@
           <a:bodyPr wrap="square" lIns="0" tIns="0" rIns="0" bIns="0" rtlCol="0" anchor="ctr"/>
           <a:lstStyle/>
           <a:p>
-            <a:pPr algn="l" indent="0" marL="0">
+            <a:pPr marL="0" indent="0" algn="l">
               <a:buNone/>
             </a:pPr>
             <a:r>
@@ -3558,13 +3518,20 @@
             <a:prstDash val="solid"/>
           </a:ln>
           <a:effectLst>
-            <a:outerShdw sx="100000" sy="100000" kx="0" ky="0" algn="bl" rotWithShape="0" blurRad="101600" dist="38100" dir="8100000">
+            <a:outerShdw blurRad="101600" dist="38100" dir="8100000" algn="bl" rotWithShape="0">
               <a:srgbClr val="000000">
                 <a:alpha val="25000"/>
               </a:srgbClr>
             </a:outerShdw>
           </a:effectLst>
         </p:spPr>
+        <p:txBody>
+          <a:bodyPr/>
+          <a:lstStyle/>
+          <a:p>
+            <a:endParaRPr lang="en-GB"/>
+          </a:p>
+        </p:txBody>
       </p:sp>
       <p:sp>
         <p:nvSpPr>
@@ -3590,6 +3557,13 @@
             <a:prstDash val="solid"/>
           </a:ln>
         </p:spPr>
+        <p:txBody>
+          <a:bodyPr/>
+          <a:lstStyle/>
+          <a:p>
+            <a:endParaRPr lang="en-GB"/>
+          </a:p>
+        </p:txBody>
       </p:sp>
       <p:sp>
         <p:nvSpPr>
@@ -3612,7 +3586,7 @@
           <a:bodyPr wrap="square" lIns="0" tIns="0" rIns="0" bIns="0" rtlCol="0" anchor="ctr"/>
           <a:lstStyle/>
           <a:p>
-            <a:pPr algn="ctr" indent="0" marL="0">
+            <a:pPr marL="0" indent="0" algn="ctr">
               <a:buNone/>
             </a:pPr>
             <a:r>
@@ -3651,7 +3625,7 @@
           <a:bodyPr wrap="square" lIns="0" tIns="0" rIns="0" bIns="0" rtlCol="0" anchor="ctr"/>
           <a:lstStyle/>
           <a:p>
-            <a:pPr algn="l" indent="0" marL="0">
+            <a:pPr marL="0" indent="0" algn="l">
               <a:buNone/>
             </a:pPr>
             <a:r>
@@ -3693,13 +3667,20 @@
             <a:prstDash val="solid"/>
           </a:ln>
           <a:effectLst>
-            <a:outerShdw sx="100000" sy="100000" kx="0" ky="0" algn="bl" rotWithShape="0" blurRad="101600" dist="38100" dir="8100000">
+            <a:outerShdw blurRad="101600" dist="38100" dir="8100000" algn="bl" rotWithShape="0">
               <a:srgbClr val="000000">
                 <a:alpha val="25000"/>
               </a:srgbClr>
             </a:outerShdw>
           </a:effectLst>
         </p:spPr>
+        <p:txBody>
+          <a:bodyPr/>
+          <a:lstStyle/>
+          <a:p>
+            <a:endParaRPr lang="en-GB"/>
+          </a:p>
+        </p:txBody>
       </p:sp>
       <p:sp>
         <p:nvSpPr>
@@ -3725,6 +3706,13 @@
             <a:prstDash val="solid"/>
           </a:ln>
         </p:spPr>
+        <p:txBody>
+          <a:bodyPr/>
+          <a:lstStyle/>
+          <a:p>
+            <a:endParaRPr lang="en-GB"/>
+          </a:p>
+        </p:txBody>
       </p:sp>
       <p:sp>
         <p:nvSpPr>
@@ -3747,7 +3735,7 @@
           <a:bodyPr wrap="square" lIns="0" tIns="0" rIns="0" bIns="0" rtlCol="0" anchor="ctr"/>
           <a:lstStyle/>
           <a:p>
-            <a:pPr algn="ctr" indent="0" marL="0">
+            <a:pPr marL="0" indent="0" algn="ctr">
               <a:buNone/>
             </a:pPr>
             <a:r>
@@ -3786,7 +3774,7 @@
           <a:bodyPr wrap="square" lIns="0" tIns="0" rIns="0" bIns="0" rtlCol="0" anchor="ctr"/>
           <a:lstStyle/>
           <a:p>
-            <a:pPr algn="l" indent="0" marL="0">
+            <a:pPr marL="0" indent="0" algn="l">
               <a:buNone/>
             </a:pPr>
             <a:r>
@@ -3825,11 +3813,11 @@
           <a:bodyPr wrap="square" lIns="0" tIns="0" rIns="0" bIns="0" rtlCol="0" anchor="ctr"/>
           <a:lstStyle/>
           <a:p>
-            <a:pPr algn="l" indent="0" marL="0">
+            <a:pPr marL="0" indent="0" algn="l">
               <a:buNone/>
             </a:pPr>
             <a:r>
-              <a:rPr lang="en-US" sz="900" b="1" spc="300" kern="0" dirty="0">
+              <a:rPr lang="en-US" sz="900" b="1" kern="0" spc="300" dirty="0">
                 <a:solidFill>
                   <a:srgbClr val="7A9AB8"/>
                 </a:solidFill>
@@ -3867,13 +3855,20 @@
             <a:prstDash val="solid"/>
           </a:ln>
           <a:effectLst>
-            <a:outerShdw sx="100000" sy="100000" kx="0" ky="0" algn="bl" rotWithShape="0" blurRad="101600" dist="38100" dir="8100000">
+            <a:outerShdw blurRad="101600" dist="38100" dir="8100000" algn="bl" rotWithShape="0">
               <a:srgbClr val="000000">
                 <a:alpha val="25000"/>
               </a:srgbClr>
             </a:outerShdw>
           </a:effectLst>
         </p:spPr>
+        <p:txBody>
+          <a:bodyPr/>
+          <a:lstStyle/>
+          <a:p>
+            <a:endParaRPr lang="en-GB"/>
+          </a:p>
+        </p:txBody>
       </p:sp>
       <p:sp>
         <p:nvSpPr>
@@ -3899,6 +3894,13 @@
             <a:prstDash val="solid"/>
           </a:ln>
         </p:spPr>
+        <p:txBody>
+          <a:bodyPr/>
+          <a:lstStyle/>
+          <a:p>
+            <a:endParaRPr lang="en-GB"/>
+          </a:p>
+        </p:txBody>
       </p:sp>
       <p:sp>
         <p:nvSpPr>
@@ -3921,7 +3923,7 @@
           <a:bodyPr wrap="square" lIns="0" tIns="0" rIns="0" bIns="0" rtlCol="0" anchor="ctr"/>
           <a:lstStyle/>
           <a:p>
-            <a:pPr algn="l" indent="0" marL="0">
+            <a:pPr marL="0" indent="0" algn="l">
               <a:buNone/>
             </a:pPr>
             <a:r>
@@ -3960,7 +3962,7 @@
           <a:bodyPr wrap="square" lIns="0" tIns="0" rIns="0" bIns="0" rtlCol="0" anchor="ctr"/>
           <a:lstStyle/>
           <a:p>
-            <a:pPr algn="l" indent="0" marL="0">
+            <a:pPr marL="0" indent="0" algn="l">
               <a:buNone/>
             </a:pPr>
             <a:r>
@@ -3973,36 +3975,8 @@
                 <a:cs typeface="Calibri" pitchFamily="34" charset="-120"/>
               </a:rPr>
               <a:t>• Long-running complex tasks
-</a:t>
-            </a:r>
-            <a:pPr algn="l" indent="0" marL="0">
-              <a:buNone/>
-            </a:pPr>
-            <a:r>
-              <a:rPr lang="en-US" sz="1000" dirty="0">
-                <a:solidFill>
-                  <a:srgbClr val="D0E8F5"/>
-                </a:solidFill>
-                <a:latin typeface="Calibri" pitchFamily="34" charset="0"/>
-                <a:ea typeface="Calibri" pitchFamily="34" charset="-122"/>
-                <a:cs typeface="Calibri" pitchFamily="34" charset="-120"/>
-              </a:rPr>
-              <a:t>• High-quality code output
-</a:t>
-            </a:r>
-            <a:pPr algn="l" indent="0" marL="0">
-              <a:buNone/>
-            </a:pPr>
-            <a:r>
-              <a:rPr lang="en-US" sz="1000" dirty="0">
-                <a:solidFill>
-                  <a:srgbClr val="D0E8F5"/>
-                </a:solidFill>
-                <a:latin typeface="Calibri" pitchFamily="34" charset="0"/>
-                <a:ea typeface="Calibri" pitchFamily="34" charset="-122"/>
-                <a:cs typeface="Calibri" pitchFamily="34" charset="-120"/>
-              </a:rPr>
-              <a:t>• Frontier reasoning capabilities</a:t>
+• High-quality code output
+• Frontier reasoning capabilities</a:t>
             </a:r>
             <a:endParaRPr lang="en-US" sz="1000" dirty="0"/>
           </a:p>
@@ -4032,13 +4006,20 @@
             <a:prstDash val="solid"/>
           </a:ln>
           <a:effectLst>
-            <a:outerShdw sx="100000" sy="100000" kx="0" ky="0" algn="bl" rotWithShape="0" blurRad="101600" dist="38100" dir="8100000">
+            <a:outerShdw blurRad="101600" dist="38100" dir="8100000" algn="bl" rotWithShape="0">
               <a:srgbClr val="000000">
                 <a:alpha val="25000"/>
               </a:srgbClr>
             </a:outerShdw>
           </a:effectLst>
         </p:spPr>
+        <p:txBody>
+          <a:bodyPr/>
+          <a:lstStyle/>
+          <a:p>
+            <a:endParaRPr lang="en-GB"/>
+          </a:p>
+        </p:txBody>
       </p:sp>
       <p:sp>
         <p:nvSpPr>
@@ -4064,6 +4045,13 @@
             <a:prstDash val="solid"/>
           </a:ln>
         </p:spPr>
+        <p:txBody>
+          <a:bodyPr/>
+          <a:lstStyle/>
+          <a:p>
+            <a:endParaRPr lang="en-GB"/>
+          </a:p>
+        </p:txBody>
       </p:sp>
       <p:sp>
         <p:nvSpPr>
@@ -4086,7 +4074,7 @@
           <a:bodyPr wrap="square" lIns="0" tIns="0" rIns="0" bIns="0" rtlCol="0" anchor="ctr"/>
           <a:lstStyle/>
           <a:p>
-            <a:pPr algn="l" indent="0" marL="0">
+            <a:pPr marL="0" indent="0" algn="l">
               <a:buNone/>
             </a:pPr>
             <a:r>
@@ -4125,7 +4113,7 @@
           <a:bodyPr wrap="square" lIns="0" tIns="0" rIns="0" bIns="0" rtlCol="0" anchor="ctr"/>
           <a:lstStyle/>
           <a:p>
-            <a:pPr algn="l" indent="0" marL="0">
+            <a:pPr marL="0" indent="0" algn="l">
               <a:buNone/>
             </a:pPr>
             <a:r>
@@ -4139,9 +4127,6 @@
               </a:rPr>
               <a:t>LIGHTBULB MOMENT  </a:t>
             </a:r>
-            <a:pPr algn="l" indent="0" marL="0">
-              <a:buNone/>
-            </a:pPr>
             <a:r>
               <a:rPr lang="en-US" sz="1000" dirty="0">
                 <a:solidFill>
@@ -4156,7 +4141,7 @@
             <a:endParaRPr lang="en-US" sz="1000" dirty="0"/>
           </a:p>
           <a:p>
-            <a:pPr algn="l" indent="0" marL="0">
+            <a:pPr marL="0" indent="0" algn="l">
               <a:buNone/>
             </a:pPr>
             <a:r>
@@ -4198,6 +4183,13 @@
             <a:prstDash val="solid"/>
           </a:ln>
         </p:spPr>
+        <p:txBody>
+          <a:bodyPr/>
+          <a:lstStyle/>
+          <a:p>
+            <a:endParaRPr lang="en-GB"/>
+          </a:p>
+        </p:txBody>
       </p:sp>
       <p:sp>
         <p:nvSpPr>
@@ -4220,7 +4212,7 @@
           <a:bodyPr wrap="square" lIns="0" tIns="0" rIns="0" bIns="0" rtlCol="0" anchor="ctr"/>
           <a:lstStyle/>
           <a:p>
-            <a:pPr algn="l" indent="0" marL="0">
+            <a:pPr marL="0" indent="0" algn="l">
               <a:buNone/>
             </a:pPr>
             <a:r>
@@ -4254,6 +4246,7 @@
         <a:solidFill>
           <a:srgbClr val="0D1B2A"/>
         </a:solidFill>
+        <a:effectLst/>
       </p:bgPr>
     </p:bg>
     <p:spTree>
@@ -4294,6 +4287,13 @@
             <a:prstDash val="solid"/>
           </a:ln>
         </p:spPr>
+        <p:txBody>
+          <a:bodyPr/>
+          <a:lstStyle/>
+          <a:p>
+            <a:endParaRPr lang="en-GB"/>
+          </a:p>
+        </p:txBody>
       </p:sp>
       <p:sp>
         <p:nvSpPr>
@@ -4319,6 +4319,13 @@
             <a:prstDash val="solid"/>
           </a:ln>
         </p:spPr>
+        <p:txBody>
+          <a:bodyPr/>
+          <a:lstStyle/>
+          <a:p>
+            <a:endParaRPr lang="en-GB"/>
+          </a:p>
+        </p:txBody>
       </p:sp>
       <p:sp>
         <p:nvSpPr>
@@ -4344,6 +4351,13 @@
             <a:prstDash val="solid"/>
           </a:ln>
         </p:spPr>
+        <p:txBody>
+          <a:bodyPr/>
+          <a:lstStyle/>
+          <a:p>
+            <a:endParaRPr lang="en-GB"/>
+          </a:p>
+        </p:txBody>
       </p:sp>
       <p:sp>
         <p:nvSpPr>
@@ -4366,7 +4380,7 @@
           <a:bodyPr wrap="square" lIns="0" tIns="0" rIns="0" bIns="0" rtlCol="0" anchor="ctr"/>
           <a:lstStyle/>
           <a:p>
-            <a:pPr algn="ctr" indent="0" marL="0">
+            <a:pPr marL="0" indent="0" algn="ctr">
               <a:buNone/>
             </a:pPr>
             <a:r>
@@ -4405,7 +4419,7 @@
           <a:bodyPr wrap="square" lIns="0" tIns="0" rIns="0" bIns="0" rtlCol="0" anchor="ctr"/>
           <a:lstStyle/>
           <a:p>
-            <a:pPr algn="l" indent="0" marL="0">
+            <a:pPr marL="0" indent="0" algn="l">
               <a:buNone/>
             </a:pPr>
             <a:r>
@@ -4444,7 +4458,7 @@
           <a:bodyPr wrap="square" lIns="0" tIns="0" rIns="0" bIns="0" rtlCol="0" anchor="ctr"/>
           <a:lstStyle/>
           <a:p>
-            <a:pPr algn="r" indent="0" marL="0">
+            <a:pPr marL="0" indent="0" algn="r">
               <a:buNone/>
             </a:pPr>
             <a:r>
@@ -4486,13 +4500,20 @@
             <a:prstDash val="solid"/>
           </a:ln>
           <a:effectLst>
-            <a:outerShdw sx="100000" sy="100000" kx="0" ky="0" algn="bl" rotWithShape="0" blurRad="101600" dist="38100" dir="8100000">
+            <a:outerShdw blurRad="101600" dist="38100" dir="8100000" algn="bl" rotWithShape="0">
               <a:srgbClr val="000000">
                 <a:alpha val="25000"/>
               </a:srgbClr>
             </a:outerShdw>
           </a:effectLst>
         </p:spPr>
+        <p:txBody>
+          <a:bodyPr/>
+          <a:lstStyle/>
+          <a:p>
+            <a:endParaRPr lang="en-GB"/>
+          </a:p>
+        </p:txBody>
       </p:sp>
       <p:sp>
         <p:nvSpPr>
@@ -4518,6 +4539,13 @@
             <a:prstDash val="solid"/>
           </a:ln>
         </p:spPr>
+        <p:txBody>
+          <a:bodyPr/>
+          <a:lstStyle/>
+          <a:p>
+            <a:endParaRPr lang="en-GB"/>
+          </a:p>
+        </p:txBody>
       </p:sp>
       <p:sp>
         <p:nvSpPr>
@@ -4540,7 +4568,7 @@
           <a:bodyPr wrap="square" lIns="0" tIns="0" rIns="0" bIns="0" rtlCol="0" anchor="ctr"/>
           <a:lstStyle/>
           <a:p>
-            <a:pPr algn="l" indent="0" marL="0">
+            <a:pPr marL="0" indent="0" algn="l">
               <a:buNone/>
             </a:pPr>
             <a:r>
@@ -4579,7 +4607,7 @@
           <a:bodyPr wrap="square" lIns="0" tIns="0" rIns="0" bIns="0" rtlCol="0" anchor="ctr"/>
           <a:lstStyle/>
           <a:p>
-            <a:pPr algn="l" indent="0" marL="0">
+            <a:pPr marL="0" indent="0" algn="l">
               <a:buNone/>
             </a:pPr>
             <a:r>
@@ -4623,6 +4651,13 @@
             <a:prstDash val="solid"/>
           </a:ln>
         </p:spPr>
+        <p:txBody>
+          <a:bodyPr/>
+          <a:lstStyle/>
+          <a:p>
+            <a:endParaRPr lang="en-GB"/>
+          </a:p>
+        </p:txBody>
       </p:sp>
       <p:sp>
         <p:nvSpPr>
@@ -4645,7 +4680,7 @@
           <a:bodyPr wrap="square" lIns="0" tIns="0" rIns="0" bIns="0" rtlCol="0" anchor="ctr"/>
           <a:lstStyle/>
           <a:p>
-            <a:pPr algn="l" indent="0" marL="0">
+            <a:pPr marL="0" indent="0" algn="l">
               <a:buNone/>
             </a:pPr>
             <a:r>
@@ -4689,6 +4724,13 @@
             <a:prstDash val="solid"/>
           </a:ln>
         </p:spPr>
+        <p:txBody>
+          <a:bodyPr/>
+          <a:lstStyle/>
+          <a:p>
+            <a:endParaRPr lang="en-GB"/>
+          </a:p>
+        </p:txBody>
       </p:sp>
       <p:sp>
         <p:nvSpPr>
@@ -4711,7 +4753,7 @@
           <a:bodyPr wrap="square" lIns="0" tIns="0" rIns="0" bIns="0" rtlCol="0" anchor="ctr"/>
           <a:lstStyle/>
           <a:p>
-            <a:pPr algn="l" indent="0" marL="0">
+            <a:pPr marL="0" indent="0" algn="l">
               <a:buNone/>
             </a:pPr>
             <a:r>
@@ -4755,6 +4797,13 @@
             <a:prstDash val="solid"/>
           </a:ln>
         </p:spPr>
+        <p:txBody>
+          <a:bodyPr/>
+          <a:lstStyle/>
+          <a:p>
+            <a:endParaRPr lang="en-GB"/>
+          </a:p>
+        </p:txBody>
       </p:sp>
       <p:sp>
         <p:nvSpPr>
@@ -4777,7 +4826,7 @@
           <a:bodyPr wrap="square" lIns="0" tIns="0" rIns="0" bIns="0" rtlCol="0" anchor="ctr"/>
           <a:lstStyle/>
           <a:p>
-            <a:pPr algn="l" indent="0" marL="0">
+            <a:pPr marL="0" indent="0" algn="l">
               <a:buNone/>
             </a:pPr>
             <a:r>
@@ -4819,13 +4868,20 @@
             <a:prstDash val="solid"/>
           </a:ln>
           <a:effectLst>
-            <a:outerShdw sx="100000" sy="100000" kx="0" ky="0" algn="bl" rotWithShape="0" blurRad="101600" dist="38100" dir="8100000">
+            <a:outerShdw blurRad="101600" dist="38100" dir="8100000" algn="bl" rotWithShape="0">
               <a:srgbClr val="000000">
                 <a:alpha val="25000"/>
               </a:srgbClr>
             </a:outerShdw>
           </a:effectLst>
         </p:spPr>
+        <p:txBody>
+          <a:bodyPr/>
+          <a:lstStyle/>
+          <a:p>
+            <a:endParaRPr lang="en-GB"/>
+          </a:p>
+        </p:txBody>
       </p:sp>
       <p:sp>
         <p:nvSpPr>
@@ -4851,6 +4907,13 @@
             <a:prstDash val="solid"/>
           </a:ln>
         </p:spPr>
+        <p:txBody>
+          <a:bodyPr/>
+          <a:lstStyle/>
+          <a:p>
+            <a:endParaRPr lang="en-GB"/>
+          </a:p>
+        </p:txBody>
       </p:sp>
       <p:sp>
         <p:nvSpPr>
@@ -4873,7 +4936,7 @@
           <a:bodyPr wrap="square" lIns="0" tIns="0" rIns="0" bIns="0" rtlCol="0" anchor="ctr"/>
           <a:lstStyle/>
           <a:p>
-            <a:pPr algn="l" indent="0" marL="0">
+            <a:pPr marL="0" indent="0" algn="l">
               <a:buNone/>
             </a:pPr>
             <a:r>
@@ -4912,7 +4975,7 @@
           <a:bodyPr wrap="square" lIns="0" tIns="0" rIns="0" bIns="0" rtlCol="0" anchor="ctr"/>
           <a:lstStyle/>
           <a:p>
-            <a:pPr algn="l" indent="0" marL="0">
+            <a:pPr marL="0" indent="0" algn="l">
               <a:buNone/>
             </a:pPr>
             <a:r>
@@ -4956,6 +5019,13 @@
             <a:prstDash val="solid"/>
           </a:ln>
         </p:spPr>
+        <p:txBody>
+          <a:bodyPr/>
+          <a:lstStyle/>
+          <a:p>
+            <a:endParaRPr lang="en-GB"/>
+          </a:p>
+        </p:txBody>
       </p:sp>
       <p:sp>
         <p:nvSpPr>
@@ -4981,6 +5051,13 @@
             <a:prstDash val="solid"/>
           </a:ln>
         </p:spPr>
+        <p:txBody>
+          <a:bodyPr/>
+          <a:lstStyle/>
+          <a:p>
+            <a:endParaRPr lang="en-GB"/>
+          </a:p>
+        </p:txBody>
       </p:sp>
       <p:sp>
         <p:nvSpPr>
@@ -5003,7 +5080,7 @@
           <a:bodyPr wrap="square" lIns="0" tIns="0" rIns="0" bIns="0" rtlCol="0" anchor="ctr"/>
           <a:lstStyle/>
           <a:p>
-            <a:pPr algn="ctr" indent="0" marL="0">
+            <a:pPr marL="0" indent="0" algn="ctr">
               <a:buNone/>
             </a:pPr>
             <a:r>
@@ -5042,7 +5119,7 @@
           <a:bodyPr wrap="square" lIns="0" tIns="0" rIns="0" bIns="0" rtlCol="0" anchor="ctr"/>
           <a:lstStyle/>
           <a:p>
-            <a:pPr algn="l" indent="0" marL="0">
+            <a:pPr marL="0" indent="0" algn="l">
               <a:buNone/>
             </a:pPr>
             <a:r>
@@ -5086,6 +5163,13 @@
             <a:prstDash val="solid"/>
           </a:ln>
         </p:spPr>
+        <p:txBody>
+          <a:bodyPr/>
+          <a:lstStyle/>
+          <a:p>
+            <a:endParaRPr lang="en-GB"/>
+          </a:p>
+        </p:txBody>
       </p:sp>
       <p:sp>
         <p:nvSpPr>
@@ -5111,6 +5195,13 @@
             <a:prstDash val="solid"/>
           </a:ln>
         </p:spPr>
+        <p:txBody>
+          <a:bodyPr/>
+          <a:lstStyle/>
+          <a:p>
+            <a:endParaRPr lang="en-GB"/>
+          </a:p>
+        </p:txBody>
       </p:sp>
       <p:sp>
         <p:nvSpPr>
@@ -5133,7 +5224,7 @@
           <a:bodyPr wrap="square" lIns="0" tIns="0" rIns="0" bIns="0" rtlCol="0" anchor="ctr"/>
           <a:lstStyle/>
           <a:p>
-            <a:pPr algn="ctr" indent="0" marL="0">
+            <a:pPr marL="0" indent="0" algn="ctr">
               <a:buNone/>
             </a:pPr>
             <a:r>
@@ -5172,7 +5263,7 @@
           <a:bodyPr wrap="square" lIns="0" tIns="0" rIns="0" bIns="0" rtlCol="0" anchor="ctr"/>
           <a:lstStyle/>
           <a:p>
-            <a:pPr algn="l" indent="0" marL="0">
+            <a:pPr marL="0" indent="0" algn="l">
               <a:buNone/>
             </a:pPr>
             <a:r>
@@ -5216,6 +5307,13 @@
             <a:prstDash val="solid"/>
           </a:ln>
         </p:spPr>
+        <p:txBody>
+          <a:bodyPr/>
+          <a:lstStyle/>
+          <a:p>
+            <a:endParaRPr lang="en-GB"/>
+          </a:p>
+        </p:txBody>
       </p:sp>
       <p:sp>
         <p:nvSpPr>
@@ -5241,6 +5339,13 @@
             <a:prstDash val="solid"/>
           </a:ln>
         </p:spPr>
+        <p:txBody>
+          <a:bodyPr/>
+          <a:lstStyle/>
+          <a:p>
+            <a:endParaRPr lang="en-GB"/>
+          </a:p>
+        </p:txBody>
       </p:sp>
       <p:sp>
         <p:nvSpPr>
@@ -5263,7 +5368,7 @@
           <a:bodyPr wrap="square" lIns="0" tIns="0" rIns="0" bIns="0" rtlCol="0" anchor="ctr"/>
           <a:lstStyle/>
           <a:p>
-            <a:pPr algn="ctr" indent="0" marL="0">
+            <a:pPr marL="0" indent="0" algn="ctr">
               <a:buNone/>
             </a:pPr>
             <a:r>
@@ -5302,7 +5407,7 @@
           <a:bodyPr wrap="square" lIns="0" tIns="0" rIns="0" bIns="0" rtlCol="0" anchor="ctr"/>
           <a:lstStyle/>
           <a:p>
-            <a:pPr algn="l" indent="0" marL="0">
+            <a:pPr marL="0" indent="0" algn="l">
               <a:buNone/>
             </a:pPr>
             <a:r>
@@ -5344,6 +5449,13 @@
             <a:prstDash val="solid"/>
           </a:ln>
         </p:spPr>
+        <p:txBody>
+          <a:bodyPr/>
+          <a:lstStyle/>
+          <a:p>
+            <a:endParaRPr lang="en-GB"/>
+          </a:p>
+        </p:txBody>
       </p:sp>
       <p:sp>
         <p:nvSpPr>
@@ -5366,7 +5478,7 @@
           <a:bodyPr wrap="square" lIns="0" tIns="0" rIns="0" bIns="0" rtlCol="0" anchor="ctr"/>
           <a:lstStyle/>
           <a:p>
-            <a:pPr algn="l" indent="0" marL="0">
+            <a:pPr marL="0" indent="0" algn="l">
               <a:buNone/>
             </a:pPr>
             <a:r>
@@ -5400,6 +5512,7 @@
         <a:solidFill>
           <a:srgbClr val="0D1B2A"/>
         </a:solidFill>
+        <a:effectLst/>
       </p:bgPr>
     </p:bg>
     <p:spTree>
@@ -5440,6 +5553,13 @@
             <a:prstDash val="solid"/>
           </a:ln>
         </p:spPr>
+        <p:txBody>
+          <a:bodyPr/>
+          <a:lstStyle/>
+          <a:p>
+            <a:endParaRPr lang="en-GB"/>
+          </a:p>
+        </p:txBody>
       </p:sp>
       <p:sp>
         <p:nvSpPr>
@@ -5465,6 +5585,13 @@
             <a:prstDash val="solid"/>
           </a:ln>
         </p:spPr>
+        <p:txBody>
+          <a:bodyPr/>
+          <a:lstStyle/>
+          <a:p>
+            <a:endParaRPr lang="en-GB"/>
+          </a:p>
+        </p:txBody>
       </p:sp>
       <p:sp>
         <p:nvSpPr>
@@ -5490,6 +5617,13 @@
             <a:prstDash val="solid"/>
           </a:ln>
         </p:spPr>
+        <p:txBody>
+          <a:bodyPr/>
+          <a:lstStyle/>
+          <a:p>
+            <a:endParaRPr lang="en-GB"/>
+          </a:p>
+        </p:txBody>
       </p:sp>
       <p:sp>
         <p:nvSpPr>
@@ -5512,7 +5646,7 @@
           <a:bodyPr wrap="square" lIns="0" tIns="0" rIns="0" bIns="0" rtlCol="0" anchor="ctr"/>
           <a:lstStyle/>
           <a:p>
-            <a:pPr algn="ctr" indent="0" marL="0">
+            <a:pPr marL="0" indent="0" algn="ctr">
               <a:buNone/>
             </a:pPr>
             <a:r>
@@ -5551,7 +5685,7 @@
           <a:bodyPr wrap="square" lIns="0" tIns="0" rIns="0" bIns="0" rtlCol="0" anchor="ctr"/>
           <a:lstStyle/>
           <a:p>
-            <a:pPr algn="l" indent="0" marL="0">
+            <a:pPr marL="0" indent="0" algn="l">
               <a:buNone/>
             </a:pPr>
             <a:r>
@@ -5577,8 +5711,8 @@
         </p:nvSpPr>
         <p:spPr>
           <a:xfrm>
-            <a:off x="731520" y="914400"/>
-            <a:ext cx="7680960" cy="3657600"/>
+            <a:off x="419927" y="948342"/>
+            <a:ext cx="5045502" cy="3744831"/>
           </a:xfrm>
           <a:prstGeom prst="rect">
             <a:avLst/>
@@ -5593,6 +5727,17 @@
             <a:prstDash val="dash"/>
           </a:ln>
         </p:spPr>
+        <p:txBody>
+          <a:bodyPr/>
+          <a:lstStyle/>
+          <a:p>
+            <a:endParaRPr lang="en-GB" dirty="0">
+              <a:solidFill>
+                <a:schemeClr val="bg1"/>
+              </a:solidFill>
+            </a:endParaRPr>
+          </a:p>
+        </p:txBody>
       </p:sp>
       <p:sp>
         <p:nvSpPr>
@@ -5615,60 +5760,10 @@
           <a:bodyPr wrap="square" lIns="0" tIns="0" rIns="0" bIns="0" rtlCol="0" anchor="ctr"/>
           <a:lstStyle/>
           <a:p>
-            <a:pPr algn="ctr" indent="0" marL="0">
+            <a:pPr marL="0" indent="0" algn="ctr">
               <a:buNone/>
             </a:pPr>
-            <a:r>
-              <a:rPr lang="en-US" sz="1800" i="1" dirty="0">
-                <a:solidFill>
-                  <a:srgbClr val="7A9AB8"/>
-                </a:solidFill>
-                <a:latin typeface="Calibri" pitchFamily="34" charset="0"/>
-                <a:ea typeface="Calibri" pitchFamily="34" charset="-122"/>
-                <a:cs typeface="Calibri" pitchFamily="34" charset="-120"/>
-              </a:rPr>
-              <a:t>[ Diagram: How the Agentic Model Works ]</a:t>
-            </a:r>
             <a:endParaRPr lang="en-US" sz="1800" dirty="0"/>
-          </a:p>
-        </p:txBody>
-      </p:sp>
-      <p:sp>
-        <p:nvSpPr>
-          <p:cNvPr id="9" name="Text 7"/>
-          <p:cNvSpPr/>
-          <p:nvPr/>
-        </p:nvSpPr>
-        <p:spPr>
-          <a:xfrm>
-            <a:off x="1097280" y="3840480"/>
-            <a:ext cx="6949440" cy="548640"/>
-          </a:xfrm>
-          <a:prstGeom prst="rect">
-            <a:avLst/>
-          </a:prstGeom>
-          <a:noFill/>
-          <a:ln/>
-        </p:spPr>
-        <p:txBody>
-          <a:bodyPr wrap="square" lIns="0" tIns="0" rIns="0" bIns="0" rtlCol="0" anchor="ctr"/>
-          <a:lstStyle/>
-          <a:p>
-            <a:pPr algn="ctr" indent="0" marL="0">
-              <a:buNone/>
-            </a:pPr>
-            <a:r>
-              <a:rPr lang="en-US" sz="1000" i="1" dirty="0">
-                <a:solidFill>
-                  <a:srgbClr val="7A9AB8"/>
-                </a:solidFill>
-                <a:latin typeface="Calibri" pitchFamily="34" charset="0"/>
-                <a:ea typeface="Calibri" pitchFamily="34" charset="-122"/>
-                <a:cs typeface="Calibri" pitchFamily="34" charset="-120"/>
-              </a:rPr>
-              <a:t>Insert your agentic workflow diagram here — e.g. Plan → Tools → Execute → Observe → Reflect loop</a:t>
-            </a:r>
-            <a:endParaRPr lang="en-US" sz="1000" dirty="0"/>
           </a:p>
         </p:txBody>
       </p:sp>
@@ -5696,6 +5791,13 @@
             <a:prstDash val="solid"/>
           </a:ln>
         </p:spPr>
+        <p:txBody>
+          <a:bodyPr/>
+          <a:lstStyle/>
+          <a:p>
+            <a:endParaRPr lang="en-GB"/>
+          </a:p>
+        </p:txBody>
       </p:sp>
       <p:sp>
         <p:nvSpPr>
@@ -5718,7 +5820,7 @@
           <a:bodyPr wrap="square" lIns="0" tIns="0" rIns="0" bIns="0" rtlCol="0" anchor="ctr"/>
           <a:lstStyle/>
           <a:p>
-            <a:pPr algn="l" indent="0" marL="0">
+            <a:pPr marL="0" indent="0" algn="l">
               <a:buNone/>
             </a:pPr>
             <a:r>
@@ -5733,6 +5835,1592 @@
               <a:t>My Journey into AI  |  Slide 4</a:t>
             </a:r>
             <a:endParaRPr lang="en-US" sz="900" dirty="0"/>
+          </a:p>
+        </p:txBody>
+      </p:sp>
+      <p:sp>
+        <p:nvSpPr>
+          <p:cNvPr id="12" name="Rectangle 11">
+            <a:extLst>
+              <a:ext uri="{FF2B5EF4-FFF2-40B4-BE49-F238E27FC236}">
+                <a16:creationId xmlns:a16="http://schemas.microsoft.com/office/drawing/2014/main" id="{818E9A63-C962-5D0C-C7B0-0EB8B5A7BBD6}"/>
+              </a:ext>
+            </a:extLst>
+          </p:cNvPr>
+          <p:cNvSpPr/>
+          <p:nvPr/>
+        </p:nvSpPr>
+        <p:spPr>
+          <a:xfrm>
+            <a:off x="2283773" y="1213335"/>
+            <a:ext cx="1077433" cy="481121"/>
+          </a:xfrm>
+          <a:prstGeom prst="rect">
+            <a:avLst/>
+          </a:prstGeom>
+          <a:solidFill>
+            <a:schemeClr val="tx2">
+              <a:lumMod val="75000"/>
+            </a:schemeClr>
+          </a:solidFill>
+          <a:ln>
+            <a:solidFill>
+              <a:schemeClr val="accent1"/>
+            </a:solidFill>
+          </a:ln>
+        </p:spPr>
+        <p:style>
+          <a:lnRef idx="2">
+            <a:schemeClr val="accent5">
+              <a:shade val="15000"/>
+            </a:schemeClr>
+          </a:lnRef>
+          <a:fillRef idx="1">
+            <a:schemeClr val="accent5"/>
+          </a:fillRef>
+          <a:effectRef idx="0">
+            <a:schemeClr val="accent5"/>
+          </a:effectRef>
+          <a:fontRef idx="minor">
+            <a:schemeClr val="lt1"/>
+          </a:fontRef>
+        </p:style>
+        <p:txBody>
+          <a:bodyPr rtlCol="0" anchor="ctr"/>
+          <a:lstStyle/>
+          <a:p>
+            <a:pPr algn="ctr"/>
+            <a:r>
+              <a:rPr lang="en-US" dirty="0"/>
+              <a:t>LLM</a:t>
+            </a:r>
+            <a:endParaRPr lang="en-GB" dirty="0"/>
+          </a:p>
+        </p:txBody>
+      </p:sp>
+      <p:sp>
+        <p:nvSpPr>
+          <p:cNvPr id="13" name="Rectangle 12">
+            <a:extLst>
+              <a:ext uri="{FF2B5EF4-FFF2-40B4-BE49-F238E27FC236}">
+                <a16:creationId xmlns:a16="http://schemas.microsoft.com/office/drawing/2014/main" id="{FFB96587-A814-38FE-2C50-F6F8A260710E}"/>
+              </a:ext>
+            </a:extLst>
+          </p:cNvPr>
+          <p:cNvSpPr/>
+          <p:nvPr/>
+        </p:nvSpPr>
+        <p:spPr>
+          <a:xfrm>
+            <a:off x="2283772" y="1911541"/>
+            <a:ext cx="1077433" cy="481121"/>
+          </a:xfrm>
+          <a:prstGeom prst="rect">
+            <a:avLst/>
+          </a:prstGeom>
+          <a:solidFill>
+            <a:schemeClr val="tx2">
+              <a:lumMod val="75000"/>
+            </a:schemeClr>
+          </a:solidFill>
+          <a:ln>
+            <a:solidFill>
+              <a:schemeClr val="accent1"/>
+            </a:solidFill>
+          </a:ln>
+        </p:spPr>
+        <p:style>
+          <a:lnRef idx="2">
+            <a:schemeClr val="accent5">
+              <a:shade val="15000"/>
+            </a:schemeClr>
+          </a:lnRef>
+          <a:fillRef idx="1">
+            <a:schemeClr val="accent5"/>
+          </a:fillRef>
+          <a:effectRef idx="0">
+            <a:schemeClr val="accent5"/>
+          </a:effectRef>
+          <a:fontRef idx="minor">
+            <a:schemeClr val="lt1"/>
+          </a:fontRef>
+        </p:style>
+        <p:txBody>
+          <a:bodyPr rtlCol="0" anchor="ctr"/>
+          <a:lstStyle/>
+          <a:p>
+            <a:pPr algn="ctr"/>
+            <a:r>
+              <a:rPr lang="en-US" dirty="0"/>
+              <a:t>AGENT</a:t>
+            </a:r>
+            <a:endParaRPr lang="en-GB" dirty="0"/>
+          </a:p>
+        </p:txBody>
+      </p:sp>
+      <p:sp>
+        <p:nvSpPr>
+          <p:cNvPr id="14" name="Rectangle 13">
+            <a:extLst>
+              <a:ext uri="{FF2B5EF4-FFF2-40B4-BE49-F238E27FC236}">
+                <a16:creationId xmlns:a16="http://schemas.microsoft.com/office/drawing/2014/main" id="{90A46983-4E93-042A-C279-9799EE5FE5CA}"/>
+              </a:ext>
+            </a:extLst>
+          </p:cNvPr>
+          <p:cNvSpPr/>
+          <p:nvPr/>
+        </p:nvSpPr>
+        <p:spPr>
+          <a:xfrm>
+            <a:off x="561043" y="2731891"/>
+            <a:ext cx="4627645" cy="1632774"/>
+          </a:xfrm>
+          <a:prstGeom prst="rect">
+            <a:avLst/>
+          </a:prstGeom>
+          <a:solidFill>
+            <a:schemeClr val="tx2">
+              <a:lumMod val="75000"/>
+            </a:schemeClr>
+          </a:solidFill>
+          <a:ln>
+            <a:solidFill>
+              <a:schemeClr val="accent2">
+                <a:lumMod val="75000"/>
+              </a:schemeClr>
+            </a:solidFill>
+          </a:ln>
+        </p:spPr>
+        <p:style>
+          <a:lnRef idx="2">
+            <a:schemeClr val="accent1">
+              <a:shade val="15000"/>
+            </a:schemeClr>
+          </a:lnRef>
+          <a:fillRef idx="1">
+            <a:schemeClr val="accent1"/>
+          </a:fillRef>
+          <a:effectRef idx="0">
+            <a:schemeClr val="accent1"/>
+          </a:effectRef>
+          <a:fontRef idx="minor">
+            <a:schemeClr val="lt1"/>
+          </a:fontRef>
+        </p:style>
+        <p:txBody>
+          <a:bodyPr rtlCol="0" anchor="ctr"/>
+          <a:lstStyle/>
+          <a:p>
+            <a:pPr algn="ctr"/>
+            <a:endParaRPr lang="en-GB"/>
+          </a:p>
+        </p:txBody>
+      </p:sp>
+      <p:sp>
+        <p:nvSpPr>
+          <p:cNvPr id="15" name="Rectangle 14">
+            <a:extLst>
+              <a:ext uri="{FF2B5EF4-FFF2-40B4-BE49-F238E27FC236}">
+                <a16:creationId xmlns:a16="http://schemas.microsoft.com/office/drawing/2014/main" id="{9A3EC51A-2723-C911-D73E-DC040AC2F40B}"/>
+              </a:ext>
+            </a:extLst>
+          </p:cNvPr>
+          <p:cNvSpPr/>
+          <p:nvPr/>
+        </p:nvSpPr>
+        <p:spPr>
+          <a:xfrm>
+            <a:off x="713444" y="2948976"/>
+            <a:ext cx="1077433" cy="481121"/>
+          </a:xfrm>
+          <a:prstGeom prst="rect">
+            <a:avLst/>
+          </a:prstGeom>
+          <a:solidFill>
+            <a:schemeClr val="tx2">
+              <a:lumMod val="75000"/>
+            </a:schemeClr>
+          </a:solidFill>
+          <a:ln>
+            <a:solidFill>
+              <a:schemeClr val="accent1"/>
+            </a:solidFill>
+          </a:ln>
+        </p:spPr>
+        <p:style>
+          <a:lnRef idx="2">
+            <a:schemeClr val="accent5">
+              <a:shade val="15000"/>
+            </a:schemeClr>
+          </a:lnRef>
+          <a:fillRef idx="1">
+            <a:schemeClr val="accent5"/>
+          </a:fillRef>
+          <a:effectRef idx="0">
+            <a:schemeClr val="accent5"/>
+          </a:effectRef>
+          <a:fontRef idx="minor">
+            <a:schemeClr val="lt1"/>
+          </a:fontRef>
+        </p:style>
+        <p:txBody>
+          <a:bodyPr rtlCol="0" anchor="ctr"/>
+          <a:lstStyle/>
+          <a:p>
+            <a:pPr algn="ctr"/>
+            <a:r>
+              <a:rPr lang="en-US" sz="1200" dirty="0"/>
+              <a:t>SYSTEM</a:t>
+            </a:r>
+          </a:p>
+          <a:p>
+            <a:pPr algn="ctr"/>
+            <a:r>
+              <a:rPr lang="en-US" sz="1200" dirty="0"/>
+              <a:t>PROMPT</a:t>
+            </a:r>
+            <a:endParaRPr lang="en-GB" sz="1200" dirty="0"/>
+          </a:p>
+        </p:txBody>
+      </p:sp>
+      <p:sp>
+        <p:nvSpPr>
+          <p:cNvPr id="16" name="Rectangle 15">
+            <a:extLst>
+              <a:ext uri="{FF2B5EF4-FFF2-40B4-BE49-F238E27FC236}">
+                <a16:creationId xmlns:a16="http://schemas.microsoft.com/office/drawing/2014/main" id="{5D7C7DB4-CB23-7AAD-360B-8E8C2DE7E6BE}"/>
+              </a:ext>
+            </a:extLst>
+          </p:cNvPr>
+          <p:cNvSpPr/>
+          <p:nvPr/>
+        </p:nvSpPr>
+        <p:spPr>
+          <a:xfrm>
+            <a:off x="2290963" y="2955618"/>
+            <a:ext cx="1077433" cy="481121"/>
+          </a:xfrm>
+          <a:prstGeom prst="rect">
+            <a:avLst/>
+          </a:prstGeom>
+          <a:solidFill>
+            <a:schemeClr val="tx2">
+              <a:lumMod val="75000"/>
+            </a:schemeClr>
+          </a:solidFill>
+          <a:ln>
+            <a:solidFill>
+              <a:schemeClr val="accent1"/>
+            </a:solidFill>
+          </a:ln>
+        </p:spPr>
+        <p:style>
+          <a:lnRef idx="2">
+            <a:schemeClr val="accent5">
+              <a:shade val="15000"/>
+            </a:schemeClr>
+          </a:lnRef>
+          <a:fillRef idx="1">
+            <a:schemeClr val="accent5"/>
+          </a:fillRef>
+          <a:effectRef idx="0">
+            <a:schemeClr val="accent5"/>
+          </a:effectRef>
+          <a:fontRef idx="minor">
+            <a:schemeClr val="lt1"/>
+          </a:fontRef>
+        </p:style>
+        <p:txBody>
+          <a:bodyPr rtlCol="0" anchor="ctr"/>
+          <a:lstStyle/>
+          <a:p>
+            <a:pPr algn="ctr"/>
+            <a:r>
+              <a:rPr lang="en-US" sz="1200" dirty="0"/>
+              <a:t>RESOURCES</a:t>
+            </a:r>
+            <a:endParaRPr lang="en-GB" sz="1200" dirty="0"/>
+          </a:p>
+        </p:txBody>
+      </p:sp>
+      <p:sp>
+        <p:nvSpPr>
+          <p:cNvPr id="17" name="Rectangle 16">
+            <a:extLst>
+              <a:ext uri="{FF2B5EF4-FFF2-40B4-BE49-F238E27FC236}">
+                <a16:creationId xmlns:a16="http://schemas.microsoft.com/office/drawing/2014/main" id="{5448A0AA-C261-7E2E-7F18-34DB1DFF38E5}"/>
+              </a:ext>
+            </a:extLst>
+          </p:cNvPr>
+          <p:cNvSpPr/>
+          <p:nvPr/>
+        </p:nvSpPr>
+        <p:spPr>
+          <a:xfrm>
+            <a:off x="3864936" y="3047687"/>
+            <a:ext cx="1077433" cy="481121"/>
+          </a:xfrm>
+          <a:prstGeom prst="rect">
+            <a:avLst/>
+          </a:prstGeom>
+          <a:solidFill>
+            <a:schemeClr val="tx2">
+              <a:lumMod val="75000"/>
+            </a:schemeClr>
+          </a:solidFill>
+          <a:ln>
+            <a:solidFill>
+              <a:schemeClr val="accent1"/>
+            </a:solidFill>
+          </a:ln>
+        </p:spPr>
+        <p:style>
+          <a:lnRef idx="2">
+            <a:schemeClr val="accent5">
+              <a:shade val="15000"/>
+            </a:schemeClr>
+          </a:lnRef>
+          <a:fillRef idx="1">
+            <a:schemeClr val="accent5"/>
+          </a:fillRef>
+          <a:effectRef idx="0">
+            <a:schemeClr val="accent5"/>
+          </a:effectRef>
+          <a:fontRef idx="minor">
+            <a:schemeClr val="lt1"/>
+          </a:fontRef>
+        </p:style>
+        <p:txBody>
+          <a:bodyPr rtlCol="0" anchor="ctr"/>
+          <a:lstStyle/>
+          <a:p>
+            <a:pPr algn="ctr"/>
+            <a:r>
+              <a:rPr lang="en-US" sz="1200" dirty="0"/>
+              <a:t>ASSISTANT</a:t>
+            </a:r>
+          </a:p>
+          <a:p>
+            <a:pPr algn="ctr"/>
+            <a:r>
+              <a:rPr lang="en-US" sz="1200" dirty="0"/>
+              <a:t>MESSAGES</a:t>
+            </a:r>
+            <a:endParaRPr lang="en-GB" sz="1200" dirty="0"/>
+          </a:p>
+        </p:txBody>
+      </p:sp>
+      <p:sp>
+        <p:nvSpPr>
+          <p:cNvPr id="18" name="Rectangle 17">
+            <a:extLst>
+              <a:ext uri="{FF2B5EF4-FFF2-40B4-BE49-F238E27FC236}">
+                <a16:creationId xmlns:a16="http://schemas.microsoft.com/office/drawing/2014/main" id="{5C1F3BD0-F18E-BA34-FA8C-ACE8F454E54D}"/>
+              </a:ext>
+            </a:extLst>
+          </p:cNvPr>
+          <p:cNvSpPr/>
+          <p:nvPr/>
+        </p:nvSpPr>
+        <p:spPr>
+          <a:xfrm>
+            <a:off x="709898" y="3707394"/>
+            <a:ext cx="1077433" cy="481121"/>
+          </a:xfrm>
+          <a:prstGeom prst="rect">
+            <a:avLst/>
+          </a:prstGeom>
+          <a:solidFill>
+            <a:schemeClr val="tx2">
+              <a:lumMod val="75000"/>
+            </a:schemeClr>
+          </a:solidFill>
+          <a:ln>
+            <a:solidFill>
+              <a:schemeClr val="accent1"/>
+            </a:solidFill>
+          </a:ln>
+        </p:spPr>
+        <p:style>
+          <a:lnRef idx="2">
+            <a:schemeClr val="accent5">
+              <a:shade val="15000"/>
+            </a:schemeClr>
+          </a:lnRef>
+          <a:fillRef idx="1">
+            <a:schemeClr val="accent5"/>
+          </a:fillRef>
+          <a:effectRef idx="0">
+            <a:schemeClr val="accent5"/>
+          </a:effectRef>
+          <a:fontRef idx="minor">
+            <a:schemeClr val="lt1"/>
+          </a:fontRef>
+        </p:style>
+        <p:txBody>
+          <a:bodyPr rtlCol="0" anchor="ctr"/>
+          <a:lstStyle/>
+          <a:p>
+            <a:pPr algn="ctr"/>
+            <a:r>
+              <a:rPr lang="en-US" dirty="0"/>
+              <a:t>TOOLS</a:t>
+            </a:r>
+            <a:endParaRPr lang="en-GB" dirty="0"/>
+          </a:p>
+        </p:txBody>
+      </p:sp>
+      <p:sp>
+        <p:nvSpPr>
+          <p:cNvPr id="19" name="Rectangle 18">
+            <a:extLst>
+              <a:ext uri="{FF2B5EF4-FFF2-40B4-BE49-F238E27FC236}">
+                <a16:creationId xmlns:a16="http://schemas.microsoft.com/office/drawing/2014/main" id="{4753B86C-1810-13BE-46A0-07EAFE7A4FDD}"/>
+              </a:ext>
+            </a:extLst>
+          </p:cNvPr>
+          <p:cNvSpPr/>
+          <p:nvPr/>
+        </p:nvSpPr>
+        <p:spPr>
+          <a:xfrm>
+            <a:off x="2290963" y="3714037"/>
+            <a:ext cx="1077433" cy="481121"/>
+          </a:xfrm>
+          <a:prstGeom prst="rect">
+            <a:avLst/>
+          </a:prstGeom>
+          <a:solidFill>
+            <a:schemeClr val="tx2">
+              <a:lumMod val="75000"/>
+            </a:schemeClr>
+          </a:solidFill>
+          <a:ln>
+            <a:solidFill>
+              <a:schemeClr val="accent1"/>
+            </a:solidFill>
+          </a:ln>
+        </p:spPr>
+        <p:style>
+          <a:lnRef idx="2">
+            <a:schemeClr val="accent5">
+              <a:shade val="15000"/>
+            </a:schemeClr>
+          </a:lnRef>
+          <a:fillRef idx="1">
+            <a:schemeClr val="accent5"/>
+          </a:fillRef>
+          <a:effectRef idx="0">
+            <a:schemeClr val="accent5"/>
+          </a:effectRef>
+          <a:fontRef idx="minor">
+            <a:schemeClr val="lt1"/>
+          </a:fontRef>
+        </p:style>
+        <p:txBody>
+          <a:bodyPr rtlCol="0" anchor="ctr"/>
+          <a:lstStyle/>
+          <a:p>
+            <a:pPr algn="ctr"/>
+            <a:r>
+              <a:rPr lang="en-US" sz="1200" dirty="0"/>
+              <a:t>USER MESSAGE</a:t>
+            </a:r>
+            <a:endParaRPr lang="en-GB" sz="1200" dirty="0"/>
+          </a:p>
+        </p:txBody>
+      </p:sp>
+      <p:sp>
+        <p:nvSpPr>
+          <p:cNvPr id="20" name="Rectangle 19">
+            <a:extLst>
+              <a:ext uri="{FF2B5EF4-FFF2-40B4-BE49-F238E27FC236}">
+                <a16:creationId xmlns:a16="http://schemas.microsoft.com/office/drawing/2014/main" id="{87791258-E613-0EC6-784A-97181ED93DB1}"/>
+              </a:ext>
+            </a:extLst>
+          </p:cNvPr>
+          <p:cNvSpPr/>
+          <p:nvPr/>
+        </p:nvSpPr>
+        <p:spPr>
+          <a:xfrm>
+            <a:off x="3864936" y="3751653"/>
+            <a:ext cx="1077433" cy="481121"/>
+          </a:xfrm>
+          <a:prstGeom prst="rect">
+            <a:avLst/>
+          </a:prstGeom>
+          <a:solidFill>
+            <a:schemeClr val="tx2">
+              <a:lumMod val="75000"/>
+            </a:schemeClr>
+          </a:solidFill>
+          <a:ln>
+            <a:solidFill>
+              <a:schemeClr val="accent1"/>
+            </a:solidFill>
+          </a:ln>
+        </p:spPr>
+        <p:style>
+          <a:lnRef idx="2">
+            <a:schemeClr val="accent5">
+              <a:shade val="15000"/>
+            </a:schemeClr>
+          </a:lnRef>
+          <a:fillRef idx="1">
+            <a:schemeClr val="accent5"/>
+          </a:fillRef>
+          <a:effectRef idx="0">
+            <a:schemeClr val="accent5"/>
+          </a:effectRef>
+          <a:fontRef idx="minor">
+            <a:schemeClr val="lt1"/>
+          </a:fontRef>
+        </p:style>
+        <p:txBody>
+          <a:bodyPr rtlCol="0" anchor="ctr"/>
+          <a:lstStyle/>
+          <a:p>
+            <a:pPr algn="ctr"/>
+            <a:r>
+              <a:rPr lang="en-US" sz="1050" dirty="0"/>
+              <a:t>TOOL</a:t>
+            </a:r>
+          </a:p>
+          <a:p>
+            <a:pPr algn="ctr"/>
+            <a:r>
+              <a:rPr lang="en-US" sz="1050" dirty="0"/>
+              <a:t>CALL/RESPONSE</a:t>
+            </a:r>
+            <a:endParaRPr lang="en-GB" sz="1050" dirty="0"/>
+          </a:p>
+        </p:txBody>
+      </p:sp>
+      <p:sp>
+        <p:nvSpPr>
+          <p:cNvPr id="22" name="Rectangle 21">
+            <a:extLst>
+              <a:ext uri="{FF2B5EF4-FFF2-40B4-BE49-F238E27FC236}">
+                <a16:creationId xmlns:a16="http://schemas.microsoft.com/office/drawing/2014/main" id="{7410C9A0-DAEF-D2C7-A848-466F75D9E920}"/>
+              </a:ext>
+            </a:extLst>
+          </p:cNvPr>
+          <p:cNvSpPr/>
+          <p:nvPr/>
+        </p:nvSpPr>
+        <p:spPr>
+          <a:xfrm>
+            <a:off x="3776331" y="2976144"/>
+            <a:ext cx="1077433" cy="481121"/>
+          </a:xfrm>
+          <a:prstGeom prst="rect">
+            <a:avLst/>
+          </a:prstGeom>
+          <a:solidFill>
+            <a:schemeClr val="tx2">
+              <a:lumMod val="75000"/>
+            </a:schemeClr>
+          </a:solidFill>
+          <a:ln>
+            <a:solidFill>
+              <a:schemeClr val="accent1"/>
+            </a:solidFill>
+          </a:ln>
+        </p:spPr>
+        <p:style>
+          <a:lnRef idx="2">
+            <a:schemeClr val="accent5">
+              <a:shade val="15000"/>
+            </a:schemeClr>
+          </a:lnRef>
+          <a:fillRef idx="1">
+            <a:schemeClr val="accent5"/>
+          </a:fillRef>
+          <a:effectRef idx="0">
+            <a:schemeClr val="accent5"/>
+          </a:effectRef>
+          <a:fontRef idx="minor">
+            <a:schemeClr val="lt1"/>
+          </a:fontRef>
+        </p:style>
+        <p:txBody>
+          <a:bodyPr rtlCol="0" anchor="ctr"/>
+          <a:lstStyle/>
+          <a:p>
+            <a:pPr algn="ctr"/>
+            <a:r>
+              <a:rPr lang="en-US" sz="1200" dirty="0"/>
+              <a:t>ASSISTANT</a:t>
+            </a:r>
+          </a:p>
+          <a:p>
+            <a:pPr algn="ctr"/>
+            <a:r>
+              <a:rPr lang="en-US" sz="1200" dirty="0"/>
+              <a:t>MESSAGES</a:t>
+            </a:r>
+            <a:endParaRPr lang="en-GB" sz="1200" dirty="0"/>
+          </a:p>
+        </p:txBody>
+      </p:sp>
+      <p:sp>
+        <p:nvSpPr>
+          <p:cNvPr id="23" name="Rectangle 22">
+            <a:extLst>
+              <a:ext uri="{FF2B5EF4-FFF2-40B4-BE49-F238E27FC236}">
+                <a16:creationId xmlns:a16="http://schemas.microsoft.com/office/drawing/2014/main" id="{BCB0464A-BAA5-6EC7-C147-95AC12F0CA08}"/>
+              </a:ext>
+            </a:extLst>
+          </p:cNvPr>
+          <p:cNvSpPr/>
+          <p:nvPr/>
+        </p:nvSpPr>
+        <p:spPr>
+          <a:xfrm>
+            <a:off x="3776330" y="3690076"/>
+            <a:ext cx="1077433" cy="481121"/>
+          </a:xfrm>
+          <a:prstGeom prst="rect">
+            <a:avLst/>
+          </a:prstGeom>
+          <a:solidFill>
+            <a:schemeClr val="tx2">
+              <a:lumMod val="75000"/>
+            </a:schemeClr>
+          </a:solidFill>
+          <a:ln>
+            <a:solidFill>
+              <a:schemeClr val="accent1"/>
+            </a:solidFill>
+          </a:ln>
+        </p:spPr>
+        <p:style>
+          <a:lnRef idx="2">
+            <a:schemeClr val="accent5">
+              <a:shade val="15000"/>
+            </a:schemeClr>
+          </a:lnRef>
+          <a:fillRef idx="1">
+            <a:schemeClr val="accent5"/>
+          </a:fillRef>
+          <a:effectRef idx="0">
+            <a:schemeClr val="accent5"/>
+          </a:effectRef>
+          <a:fontRef idx="minor">
+            <a:schemeClr val="lt1"/>
+          </a:fontRef>
+        </p:style>
+        <p:txBody>
+          <a:bodyPr rtlCol="0" anchor="ctr"/>
+          <a:lstStyle/>
+          <a:p>
+            <a:pPr algn="ctr"/>
+            <a:r>
+              <a:rPr lang="en-US" sz="1050" dirty="0"/>
+              <a:t>TOOL</a:t>
+            </a:r>
+          </a:p>
+          <a:p>
+            <a:pPr algn="ctr"/>
+            <a:r>
+              <a:rPr lang="en-US" sz="1050" dirty="0"/>
+              <a:t>CALL/RESPONSE</a:t>
+            </a:r>
+            <a:endParaRPr lang="en-GB" sz="1050" dirty="0"/>
+          </a:p>
+        </p:txBody>
+      </p:sp>
+      <p:sp>
+        <p:nvSpPr>
+          <p:cNvPr id="24" name="Rectangle 23">
+            <a:extLst>
+              <a:ext uri="{FF2B5EF4-FFF2-40B4-BE49-F238E27FC236}">
+                <a16:creationId xmlns:a16="http://schemas.microsoft.com/office/drawing/2014/main" id="{83EC2549-7717-AF42-FA70-01E63F967D4E}"/>
+              </a:ext>
+            </a:extLst>
+          </p:cNvPr>
+          <p:cNvSpPr/>
+          <p:nvPr/>
+        </p:nvSpPr>
+        <p:spPr>
+          <a:xfrm>
+            <a:off x="2198811" y="3644663"/>
+            <a:ext cx="1077433" cy="481121"/>
+          </a:xfrm>
+          <a:prstGeom prst="rect">
+            <a:avLst/>
+          </a:prstGeom>
+          <a:solidFill>
+            <a:schemeClr val="tx2">
+              <a:lumMod val="75000"/>
+            </a:schemeClr>
+          </a:solidFill>
+          <a:ln>
+            <a:solidFill>
+              <a:schemeClr val="accent1"/>
+            </a:solidFill>
+          </a:ln>
+        </p:spPr>
+        <p:style>
+          <a:lnRef idx="2">
+            <a:schemeClr val="accent5">
+              <a:shade val="15000"/>
+            </a:schemeClr>
+          </a:lnRef>
+          <a:fillRef idx="1">
+            <a:schemeClr val="accent5"/>
+          </a:fillRef>
+          <a:effectRef idx="0">
+            <a:schemeClr val="accent5"/>
+          </a:effectRef>
+          <a:fontRef idx="minor">
+            <a:schemeClr val="lt1"/>
+          </a:fontRef>
+        </p:style>
+        <p:txBody>
+          <a:bodyPr rtlCol="0" anchor="ctr"/>
+          <a:lstStyle/>
+          <a:p>
+            <a:pPr algn="ctr"/>
+            <a:r>
+              <a:rPr lang="en-US" sz="1200" dirty="0"/>
+              <a:t>USER MESSAGE</a:t>
+            </a:r>
+            <a:endParaRPr lang="en-GB" sz="1200" dirty="0"/>
+          </a:p>
+        </p:txBody>
+      </p:sp>
+      <p:cxnSp>
+        <p:nvCxnSpPr>
+          <p:cNvPr id="26" name="Straight Arrow Connector 25">
+            <a:extLst>
+              <a:ext uri="{FF2B5EF4-FFF2-40B4-BE49-F238E27FC236}">
+                <a16:creationId xmlns:a16="http://schemas.microsoft.com/office/drawing/2014/main" id="{2BF417D8-F98B-8A5A-DC08-63F984590C7B}"/>
+              </a:ext>
+            </a:extLst>
+          </p:cNvPr>
+          <p:cNvCxnSpPr>
+            <a:cxnSpLocks/>
+          </p:cNvCxnSpPr>
+          <p:nvPr/>
+        </p:nvCxnSpPr>
+        <p:spPr>
+          <a:xfrm>
+            <a:off x="1613630" y="1436278"/>
+            <a:ext cx="661737" cy="0"/>
+          </a:xfrm>
+          <a:prstGeom prst="straightConnector1">
+            <a:avLst/>
+          </a:prstGeom>
+          <a:ln>
+            <a:solidFill>
+              <a:schemeClr val="accent1">
+                <a:lumMod val="40000"/>
+                <a:lumOff val="60000"/>
+              </a:schemeClr>
+            </a:solidFill>
+            <a:tailEnd type="triangle"/>
+          </a:ln>
+        </p:spPr>
+        <p:style>
+          <a:lnRef idx="1">
+            <a:schemeClr val="accent1"/>
+          </a:lnRef>
+          <a:fillRef idx="0">
+            <a:schemeClr val="accent1"/>
+          </a:fillRef>
+          <a:effectRef idx="0">
+            <a:schemeClr val="accent1"/>
+          </a:effectRef>
+          <a:fontRef idx="minor">
+            <a:schemeClr val="tx1"/>
+          </a:fontRef>
+        </p:style>
+      </p:cxnSp>
+      <p:cxnSp>
+        <p:nvCxnSpPr>
+          <p:cNvPr id="27" name="Straight Arrow Connector 26">
+            <a:extLst>
+              <a:ext uri="{FF2B5EF4-FFF2-40B4-BE49-F238E27FC236}">
+                <a16:creationId xmlns:a16="http://schemas.microsoft.com/office/drawing/2014/main" id="{AC4612AD-351A-3F28-493A-C90DE72961AB}"/>
+              </a:ext>
+            </a:extLst>
+          </p:cNvPr>
+          <p:cNvCxnSpPr>
+            <a:cxnSpLocks/>
+          </p:cNvCxnSpPr>
+          <p:nvPr/>
+        </p:nvCxnSpPr>
+        <p:spPr>
+          <a:xfrm>
+            <a:off x="1645564" y="2132183"/>
+            <a:ext cx="629803" cy="0"/>
+          </a:xfrm>
+          <a:prstGeom prst="straightConnector1">
+            <a:avLst/>
+          </a:prstGeom>
+          <a:ln>
+            <a:solidFill>
+              <a:schemeClr val="accent1">
+                <a:lumMod val="40000"/>
+                <a:lumOff val="60000"/>
+              </a:schemeClr>
+            </a:solidFill>
+            <a:tailEnd type="triangle"/>
+          </a:ln>
+        </p:spPr>
+        <p:style>
+          <a:lnRef idx="1">
+            <a:schemeClr val="accent1"/>
+          </a:lnRef>
+          <a:fillRef idx="0">
+            <a:schemeClr val="accent1"/>
+          </a:fillRef>
+          <a:effectRef idx="0">
+            <a:schemeClr val="accent1"/>
+          </a:effectRef>
+          <a:fontRef idx="minor">
+            <a:schemeClr val="tx1"/>
+          </a:fontRef>
+        </p:style>
+      </p:cxnSp>
+      <p:cxnSp>
+        <p:nvCxnSpPr>
+          <p:cNvPr id="28" name="Straight Arrow Connector 27">
+            <a:extLst>
+              <a:ext uri="{FF2B5EF4-FFF2-40B4-BE49-F238E27FC236}">
+                <a16:creationId xmlns:a16="http://schemas.microsoft.com/office/drawing/2014/main" id="{05532094-97BF-0600-A3CE-EC0C72BB8977}"/>
+              </a:ext>
+            </a:extLst>
+          </p:cNvPr>
+          <p:cNvCxnSpPr>
+            <a:cxnSpLocks/>
+          </p:cNvCxnSpPr>
+          <p:nvPr/>
+        </p:nvCxnSpPr>
+        <p:spPr>
+          <a:xfrm>
+            <a:off x="3361206" y="1422847"/>
+            <a:ext cx="751675" cy="0"/>
+          </a:xfrm>
+          <a:prstGeom prst="straightConnector1">
+            <a:avLst/>
+          </a:prstGeom>
+          <a:ln>
+            <a:solidFill>
+              <a:schemeClr val="accent1">
+                <a:lumMod val="40000"/>
+                <a:lumOff val="60000"/>
+              </a:schemeClr>
+            </a:solidFill>
+            <a:tailEnd type="triangle"/>
+          </a:ln>
+        </p:spPr>
+        <p:style>
+          <a:lnRef idx="1">
+            <a:schemeClr val="accent1"/>
+          </a:lnRef>
+          <a:fillRef idx="0">
+            <a:schemeClr val="accent1"/>
+          </a:fillRef>
+          <a:effectRef idx="0">
+            <a:schemeClr val="accent1"/>
+          </a:effectRef>
+          <a:fontRef idx="minor">
+            <a:schemeClr val="tx1"/>
+          </a:fontRef>
+        </p:style>
+      </p:cxnSp>
+      <p:cxnSp>
+        <p:nvCxnSpPr>
+          <p:cNvPr id="29" name="Straight Arrow Connector 28">
+            <a:extLst>
+              <a:ext uri="{FF2B5EF4-FFF2-40B4-BE49-F238E27FC236}">
+                <a16:creationId xmlns:a16="http://schemas.microsoft.com/office/drawing/2014/main" id="{BDE86C0C-64A3-8E9D-2157-F46FEA6565C4}"/>
+              </a:ext>
+            </a:extLst>
+          </p:cNvPr>
+          <p:cNvCxnSpPr>
+            <a:cxnSpLocks/>
+          </p:cNvCxnSpPr>
+          <p:nvPr/>
+        </p:nvCxnSpPr>
+        <p:spPr>
+          <a:xfrm flipV="1">
+            <a:off x="3361206" y="2132183"/>
+            <a:ext cx="744734" cy="5173"/>
+          </a:xfrm>
+          <a:prstGeom prst="straightConnector1">
+            <a:avLst/>
+          </a:prstGeom>
+          <a:ln>
+            <a:solidFill>
+              <a:schemeClr val="accent1">
+                <a:lumMod val="40000"/>
+                <a:lumOff val="60000"/>
+              </a:schemeClr>
+            </a:solidFill>
+            <a:tailEnd type="triangle"/>
+          </a:ln>
+        </p:spPr>
+        <p:style>
+          <a:lnRef idx="1">
+            <a:schemeClr val="accent1"/>
+          </a:lnRef>
+          <a:fillRef idx="0">
+            <a:schemeClr val="accent1"/>
+          </a:fillRef>
+          <a:effectRef idx="0">
+            <a:schemeClr val="accent1"/>
+          </a:effectRef>
+          <a:fontRef idx="minor">
+            <a:schemeClr val="tx1"/>
+          </a:fontRef>
+        </p:style>
+      </p:cxnSp>
+      <p:sp>
+        <p:nvSpPr>
+          <p:cNvPr id="30" name="TextBox 29">
+            <a:extLst>
+              <a:ext uri="{FF2B5EF4-FFF2-40B4-BE49-F238E27FC236}">
+                <a16:creationId xmlns:a16="http://schemas.microsoft.com/office/drawing/2014/main" id="{47DF331E-C92F-C558-861A-75DB88D5D81C}"/>
+              </a:ext>
+            </a:extLst>
+          </p:cNvPr>
+          <p:cNvSpPr txBox="1"/>
+          <p:nvPr/>
+        </p:nvSpPr>
+        <p:spPr>
+          <a:xfrm>
+            <a:off x="776427" y="1289051"/>
+            <a:ext cx="821956" cy="369332"/>
+          </a:xfrm>
+          <a:prstGeom prst="rect">
+            <a:avLst/>
+          </a:prstGeom>
+          <a:noFill/>
+        </p:spPr>
+        <p:txBody>
+          <a:bodyPr wrap="none" rtlCol="0">
+            <a:spAutoFit/>
+          </a:bodyPr>
+          <a:lstStyle/>
+          <a:p>
+            <a:r>
+              <a:rPr lang="en-US" dirty="0">
+                <a:solidFill>
+                  <a:schemeClr val="bg1"/>
+                </a:solidFill>
+              </a:rPr>
+              <a:t>Tokens</a:t>
+            </a:r>
+            <a:endParaRPr lang="en-GB" dirty="0">
+              <a:solidFill>
+                <a:schemeClr val="bg1"/>
+              </a:solidFill>
+            </a:endParaRPr>
+          </a:p>
+        </p:txBody>
+      </p:sp>
+      <p:sp>
+        <p:nvSpPr>
+          <p:cNvPr id="31" name="TextBox 30">
+            <a:extLst>
+              <a:ext uri="{FF2B5EF4-FFF2-40B4-BE49-F238E27FC236}">
+                <a16:creationId xmlns:a16="http://schemas.microsoft.com/office/drawing/2014/main" id="{671B8A76-35EA-FDA5-EBF3-C272F15295CD}"/>
+              </a:ext>
+            </a:extLst>
+          </p:cNvPr>
+          <p:cNvSpPr txBox="1"/>
+          <p:nvPr/>
+        </p:nvSpPr>
+        <p:spPr>
+          <a:xfrm>
+            <a:off x="4199811" y="1216210"/>
+            <a:ext cx="682303" cy="523220"/>
+          </a:xfrm>
+          <a:prstGeom prst="rect">
+            <a:avLst/>
+          </a:prstGeom>
+          <a:noFill/>
+        </p:spPr>
+        <p:txBody>
+          <a:bodyPr wrap="none" rtlCol="0">
+            <a:spAutoFit/>
+          </a:bodyPr>
+          <a:lstStyle/>
+          <a:p>
+            <a:r>
+              <a:rPr lang="en-US" sz="1400" dirty="0">
+                <a:solidFill>
+                  <a:schemeClr val="bg1"/>
+                </a:solidFill>
+              </a:rPr>
+              <a:t>Likely </a:t>
+            </a:r>
+          </a:p>
+          <a:p>
+            <a:r>
+              <a:rPr lang="en-US" sz="1400" dirty="0">
+                <a:solidFill>
+                  <a:schemeClr val="bg1"/>
+                </a:solidFill>
+              </a:rPr>
+              <a:t>Tokens</a:t>
+            </a:r>
+            <a:endParaRPr lang="en-GB" sz="1400" dirty="0">
+              <a:solidFill>
+                <a:schemeClr val="bg1"/>
+              </a:solidFill>
+            </a:endParaRPr>
+          </a:p>
+        </p:txBody>
+      </p:sp>
+      <p:cxnSp>
+        <p:nvCxnSpPr>
+          <p:cNvPr id="32" name="Straight Arrow Connector 31">
+            <a:extLst>
+              <a:ext uri="{FF2B5EF4-FFF2-40B4-BE49-F238E27FC236}">
+                <a16:creationId xmlns:a16="http://schemas.microsoft.com/office/drawing/2014/main" id="{133301E8-294F-998C-D19A-81BA4D4B27EC}"/>
+              </a:ext>
+            </a:extLst>
+          </p:cNvPr>
+          <p:cNvCxnSpPr>
+            <a:cxnSpLocks/>
+            <a:stCxn id="13" idx="0"/>
+            <a:endCxn id="12" idx="2"/>
+          </p:cNvCxnSpPr>
+          <p:nvPr/>
+        </p:nvCxnSpPr>
+        <p:spPr>
+          <a:xfrm flipV="1">
+            <a:off x="2822489" y="1694456"/>
+            <a:ext cx="1" cy="217085"/>
+          </a:xfrm>
+          <a:prstGeom prst="straightConnector1">
+            <a:avLst/>
+          </a:prstGeom>
+          <a:ln>
+            <a:solidFill>
+              <a:schemeClr val="accent1">
+                <a:lumMod val="40000"/>
+                <a:lumOff val="60000"/>
+              </a:schemeClr>
+            </a:solidFill>
+            <a:tailEnd type="triangle"/>
+          </a:ln>
+        </p:spPr>
+        <p:style>
+          <a:lnRef idx="1">
+            <a:schemeClr val="accent1"/>
+          </a:lnRef>
+          <a:fillRef idx="0">
+            <a:schemeClr val="accent1"/>
+          </a:fillRef>
+          <a:effectRef idx="0">
+            <a:schemeClr val="accent1"/>
+          </a:effectRef>
+          <a:fontRef idx="minor">
+            <a:schemeClr val="tx1"/>
+          </a:fontRef>
+        </p:style>
+      </p:cxnSp>
+      <p:sp>
+        <p:nvSpPr>
+          <p:cNvPr id="35" name="TextBox 34">
+            <a:extLst>
+              <a:ext uri="{FF2B5EF4-FFF2-40B4-BE49-F238E27FC236}">
+                <a16:creationId xmlns:a16="http://schemas.microsoft.com/office/drawing/2014/main" id="{D585E1E7-18E0-6FA7-5043-9EB67DF864E1}"/>
+              </a:ext>
+            </a:extLst>
+          </p:cNvPr>
+          <p:cNvSpPr txBox="1"/>
+          <p:nvPr/>
+        </p:nvSpPr>
+        <p:spPr>
+          <a:xfrm>
+            <a:off x="4160679" y="1963120"/>
+            <a:ext cx="662682" cy="369332"/>
+          </a:xfrm>
+          <a:prstGeom prst="rect">
+            <a:avLst/>
+          </a:prstGeom>
+          <a:noFill/>
+        </p:spPr>
+        <p:txBody>
+          <a:bodyPr wrap="none" rtlCol="0">
+            <a:spAutoFit/>
+          </a:bodyPr>
+          <a:lstStyle/>
+          <a:p>
+            <a:r>
+              <a:rPr lang="en-US" dirty="0">
+                <a:solidFill>
+                  <a:schemeClr val="bg1"/>
+                </a:solidFill>
+              </a:rPr>
+              <a:t>Tools</a:t>
+            </a:r>
+            <a:endParaRPr lang="en-GB" dirty="0">
+              <a:solidFill>
+                <a:schemeClr val="bg1"/>
+              </a:solidFill>
+            </a:endParaRPr>
+          </a:p>
+        </p:txBody>
+      </p:sp>
+      <p:sp>
+        <p:nvSpPr>
+          <p:cNvPr id="36" name="TextBox 35">
+            <a:extLst>
+              <a:ext uri="{FF2B5EF4-FFF2-40B4-BE49-F238E27FC236}">
+                <a16:creationId xmlns:a16="http://schemas.microsoft.com/office/drawing/2014/main" id="{C43E33C9-F1E9-BA4B-B75E-109C136915D4}"/>
+              </a:ext>
+            </a:extLst>
+          </p:cNvPr>
+          <p:cNvSpPr txBox="1"/>
+          <p:nvPr/>
+        </p:nvSpPr>
+        <p:spPr>
+          <a:xfrm>
+            <a:off x="928827" y="1950077"/>
+            <a:ext cx="684803" cy="369332"/>
+          </a:xfrm>
+          <a:prstGeom prst="rect">
+            <a:avLst/>
+          </a:prstGeom>
+          <a:noFill/>
+        </p:spPr>
+        <p:txBody>
+          <a:bodyPr wrap="none" rtlCol="0">
+            <a:spAutoFit/>
+          </a:bodyPr>
+          <a:lstStyle/>
+          <a:p>
+            <a:r>
+              <a:rPr lang="en-US" dirty="0">
+                <a:solidFill>
+                  <a:schemeClr val="bg1"/>
+                </a:solidFill>
+              </a:rPr>
+              <a:t>Input</a:t>
+            </a:r>
+            <a:endParaRPr lang="en-GB" dirty="0">
+              <a:solidFill>
+                <a:schemeClr val="bg1"/>
+              </a:solidFill>
+            </a:endParaRPr>
+          </a:p>
+        </p:txBody>
+      </p:sp>
+      <p:sp>
+        <p:nvSpPr>
+          <p:cNvPr id="49" name="Shape 5">
+            <a:extLst>
+              <a:ext uri="{FF2B5EF4-FFF2-40B4-BE49-F238E27FC236}">
+                <a16:creationId xmlns:a16="http://schemas.microsoft.com/office/drawing/2014/main" id="{5775592D-7245-3BEB-2D4D-4CC0E4A64BE6}"/>
+              </a:ext>
+            </a:extLst>
+          </p:cNvPr>
+          <p:cNvSpPr/>
+          <p:nvPr/>
+        </p:nvSpPr>
+        <p:spPr>
+          <a:xfrm>
+            <a:off x="5724779" y="954985"/>
+            <a:ext cx="3150776" cy="3744831"/>
+          </a:xfrm>
+          <a:prstGeom prst="rect">
+            <a:avLst/>
+          </a:prstGeom>
+          <a:solidFill>
+            <a:srgbClr val="16263A"/>
+          </a:solidFill>
+          <a:ln w="12700">
+            <a:solidFill>
+              <a:srgbClr val="00C9FF"/>
+            </a:solidFill>
+            <a:prstDash val="dash"/>
+          </a:ln>
+        </p:spPr>
+        <p:txBody>
+          <a:bodyPr/>
+          <a:lstStyle/>
+          <a:p>
+            <a:endParaRPr lang="en-GB" dirty="0">
+              <a:solidFill>
+                <a:schemeClr val="bg1"/>
+              </a:solidFill>
+            </a:endParaRPr>
+          </a:p>
+        </p:txBody>
+      </p:sp>
+      <p:sp>
+        <p:nvSpPr>
+          <p:cNvPr id="51" name="TextBox 50">
+            <a:extLst>
+              <a:ext uri="{FF2B5EF4-FFF2-40B4-BE49-F238E27FC236}">
+                <a16:creationId xmlns:a16="http://schemas.microsoft.com/office/drawing/2014/main" id="{4C4BA6CF-DD96-2515-7BCA-DD1AD9452C98}"/>
+              </a:ext>
+            </a:extLst>
+          </p:cNvPr>
+          <p:cNvSpPr txBox="1"/>
+          <p:nvPr/>
+        </p:nvSpPr>
+        <p:spPr>
+          <a:xfrm>
+            <a:off x="6427278" y="1104385"/>
+            <a:ext cx="1603003" cy="369332"/>
+          </a:xfrm>
+          <a:prstGeom prst="rect">
+            <a:avLst/>
+          </a:prstGeom>
+          <a:noFill/>
+        </p:spPr>
+        <p:txBody>
+          <a:bodyPr wrap="none" rtlCol="0">
+            <a:spAutoFit/>
+          </a:bodyPr>
+          <a:lstStyle/>
+          <a:p>
+            <a:r>
+              <a:rPr lang="en-US" dirty="0">
+                <a:solidFill>
+                  <a:schemeClr val="bg1"/>
+                </a:solidFill>
+              </a:rPr>
+              <a:t>System Prompt</a:t>
+            </a:r>
+            <a:endParaRPr lang="en-GB" dirty="0">
+              <a:solidFill>
+                <a:schemeClr val="bg1"/>
+              </a:solidFill>
+            </a:endParaRPr>
+          </a:p>
+        </p:txBody>
+      </p:sp>
+      <p:sp>
+        <p:nvSpPr>
+          <p:cNvPr id="53" name="Arrow: Right 52">
+            <a:extLst>
+              <a:ext uri="{FF2B5EF4-FFF2-40B4-BE49-F238E27FC236}">
+                <a16:creationId xmlns:a16="http://schemas.microsoft.com/office/drawing/2014/main" id="{C5FDCB61-C2DE-C05B-F564-3F0EE4A40A67}"/>
+              </a:ext>
+            </a:extLst>
+          </p:cNvPr>
+          <p:cNvSpPr/>
+          <p:nvPr/>
+        </p:nvSpPr>
+        <p:spPr>
+          <a:xfrm>
+            <a:off x="6358270" y="1551383"/>
+            <a:ext cx="1786270" cy="301867"/>
+          </a:xfrm>
+          <a:prstGeom prst="rightArrow">
+            <a:avLst/>
+          </a:prstGeom>
+        </p:spPr>
+        <p:style>
+          <a:lnRef idx="2">
+            <a:schemeClr val="accent1">
+              <a:shade val="15000"/>
+            </a:schemeClr>
+          </a:lnRef>
+          <a:fillRef idx="1">
+            <a:schemeClr val="accent1"/>
+          </a:fillRef>
+          <a:effectRef idx="0">
+            <a:schemeClr val="accent1"/>
+          </a:effectRef>
+          <a:fontRef idx="minor">
+            <a:schemeClr val="lt1"/>
+          </a:fontRef>
+        </p:style>
+        <p:txBody>
+          <a:bodyPr rtlCol="0" anchor="ctr"/>
+          <a:lstStyle/>
+          <a:p>
+            <a:pPr algn="ctr"/>
+            <a:endParaRPr lang="en-GB"/>
+          </a:p>
+        </p:txBody>
+      </p:sp>
+      <p:sp>
+        <p:nvSpPr>
+          <p:cNvPr id="54" name="TextBox 53">
+            <a:extLst>
+              <a:ext uri="{FF2B5EF4-FFF2-40B4-BE49-F238E27FC236}">
+                <a16:creationId xmlns:a16="http://schemas.microsoft.com/office/drawing/2014/main" id="{9C393937-6A2B-D42B-4330-C9A70D0F1426}"/>
+              </a:ext>
+            </a:extLst>
+          </p:cNvPr>
+          <p:cNvSpPr txBox="1"/>
+          <p:nvPr/>
+        </p:nvSpPr>
+        <p:spPr>
+          <a:xfrm>
+            <a:off x="5928504" y="1911541"/>
+            <a:ext cx="859531" cy="261610"/>
+          </a:xfrm>
+          <a:prstGeom prst="rect">
+            <a:avLst/>
+          </a:prstGeom>
+          <a:noFill/>
+        </p:spPr>
+        <p:txBody>
+          <a:bodyPr wrap="none" rtlCol="0">
+            <a:spAutoFit/>
+          </a:bodyPr>
+          <a:lstStyle/>
+          <a:p>
+            <a:r>
+              <a:rPr lang="en-US" sz="1100" dirty="0">
+                <a:solidFill>
+                  <a:schemeClr val="bg1"/>
+                </a:solidFill>
+              </a:rPr>
+              <a:t>Prescriptive</a:t>
+            </a:r>
+            <a:endParaRPr lang="en-GB" sz="1100" dirty="0">
+              <a:solidFill>
+                <a:schemeClr val="bg1"/>
+              </a:solidFill>
+            </a:endParaRPr>
+          </a:p>
+        </p:txBody>
+      </p:sp>
+      <p:sp>
+        <p:nvSpPr>
+          <p:cNvPr id="55" name="TextBox 54">
+            <a:extLst>
+              <a:ext uri="{FF2B5EF4-FFF2-40B4-BE49-F238E27FC236}">
+                <a16:creationId xmlns:a16="http://schemas.microsoft.com/office/drawing/2014/main" id="{0AD3C3B7-54B6-9EE5-77E3-6776DCFFC319}"/>
+              </a:ext>
+            </a:extLst>
+          </p:cNvPr>
+          <p:cNvSpPr txBox="1"/>
+          <p:nvPr/>
+        </p:nvSpPr>
+        <p:spPr>
+          <a:xfrm>
+            <a:off x="7584883" y="1898522"/>
+            <a:ext cx="790601" cy="261610"/>
+          </a:xfrm>
+          <a:prstGeom prst="rect">
+            <a:avLst/>
+          </a:prstGeom>
+          <a:noFill/>
+        </p:spPr>
+        <p:txBody>
+          <a:bodyPr wrap="none" rtlCol="0">
+            <a:spAutoFit/>
+          </a:bodyPr>
+          <a:lstStyle/>
+          <a:p>
+            <a:r>
+              <a:rPr lang="en-US" sz="1100" dirty="0">
+                <a:solidFill>
+                  <a:schemeClr val="bg1"/>
+                </a:solidFill>
+              </a:rPr>
+              <a:t>Too Vague</a:t>
+            </a:r>
+            <a:endParaRPr lang="en-GB" sz="1100" dirty="0">
+              <a:solidFill>
+                <a:schemeClr val="bg1"/>
+              </a:solidFill>
+            </a:endParaRPr>
+          </a:p>
+        </p:txBody>
+      </p:sp>
+      <p:sp>
+        <p:nvSpPr>
+          <p:cNvPr id="56" name="Rectangle 55">
+            <a:extLst>
+              <a:ext uri="{FF2B5EF4-FFF2-40B4-BE49-F238E27FC236}">
+                <a16:creationId xmlns:a16="http://schemas.microsoft.com/office/drawing/2014/main" id="{F98E7650-189E-E23E-EB0F-55645ECFA9EE}"/>
+              </a:ext>
+            </a:extLst>
+          </p:cNvPr>
+          <p:cNvSpPr/>
+          <p:nvPr/>
+        </p:nvSpPr>
+        <p:spPr>
+          <a:xfrm>
+            <a:off x="6011292" y="2308811"/>
+            <a:ext cx="2611214" cy="2171039"/>
+          </a:xfrm>
+          <a:prstGeom prst="rect">
+            <a:avLst/>
+          </a:prstGeom>
+          <a:solidFill>
+            <a:schemeClr val="accent1">
+              <a:lumMod val="75000"/>
+            </a:schemeClr>
+          </a:solidFill>
+        </p:spPr>
+        <p:style>
+          <a:lnRef idx="2">
+            <a:schemeClr val="accent1">
+              <a:shade val="15000"/>
+            </a:schemeClr>
+          </a:lnRef>
+          <a:fillRef idx="1">
+            <a:schemeClr val="accent1"/>
+          </a:fillRef>
+          <a:effectRef idx="0">
+            <a:schemeClr val="accent1"/>
+          </a:effectRef>
+          <a:fontRef idx="minor">
+            <a:schemeClr val="lt1"/>
+          </a:fontRef>
+        </p:style>
+        <p:txBody>
+          <a:bodyPr rtlCol="0" anchor="ctr"/>
+          <a:lstStyle/>
+          <a:p>
+            <a:pPr marL="171450" indent="-171450">
+              <a:buFont typeface="Wingdings" panose="05000000000000000000" pitchFamily="2" charset="2"/>
+              <a:buChar char="§"/>
+            </a:pPr>
+            <a:r>
+              <a:rPr lang="en-US" sz="1200" dirty="0"/>
+              <a:t>   Tools</a:t>
+            </a:r>
+          </a:p>
+          <a:p>
+            <a:pPr marL="742950" lvl="1" indent="-285750">
+              <a:buFont typeface="Wingdings" panose="05000000000000000000" pitchFamily="2" charset="2"/>
+              <a:buChar char="§"/>
+            </a:pPr>
+            <a:r>
+              <a:rPr lang="en-US" sz="1200" dirty="0"/>
+              <a:t>Specific / Schema</a:t>
+            </a:r>
+          </a:p>
+          <a:p>
+            <a:pPr marL="285750" indent="-285750">
+              <a:buFont typeface="Wingdings" panose="05000000000000000000" pitchFamily="2" charset="2"/>
+              <a:buChar char="§"/>
+            </a:pPr>
+            <a:r>
+              <a:rPr lang="en-US" sz="1200" dirty="0"/>
+              <a:t>Data Retrieval</a:t>
+            </a:r>
+          </a:p>
+          <a:p>
+            <a:pPr marL="742950" lvl="1" indent="-285750">
+              <a:buFont typeface="Wingdings" panose="05000000000000000000" pitchFamily="2" charset="2"/>
+              <a:buChar char="§"/>
+            </a:pPr>
+            <a:r>
+              <a:rPr lang="en-US" sz="1200" dirty="0"/>
+              <a:t>MCP</a:t>
+            </a:r>
+          </a:p>
+          <a:p>
+            <a:pPr marL="285750" indent="-285750">
+              <a:buFont typeface="Wingdings" panose="05000000000000000000" pitchFamily="2" charset="2"/>
+              <a:buChar char="§"/>
+            </a:pPr>
+            <a:r>
+              <a:rPr lang="en-US" sz="1200" dirty="0"/>
+              <a:t>Long Horizon</a:t>
+            </a:r>
+          </a:p>
+          <a:p>
+            <a:pPr marL="742950" lvl="1" indent="-285750">
+              <a:buFont typeface="Wingdings" panose="05000000000000000000" pitchFamily="2" charset="2"/>
+              <a:buChar char="§"/>
+            </a:pPr>
+            <a:r>
+              <a:rPr lang="en-US" sz="1200" dirty="0"/>
+              <a:t>Compaction</a:t>
+            </a:r>
+          </a:p>
+          <a:p>
+            <a:pPr marL="742950" lvl="1" indent="-285750">
+              <a:buFont typeface="Wingdings" panose="05000000000000000000" pitchFamily="2" charset="2"/>
+              <a:buChar char="§"/>
+            </a:pPr>
+            <a:r>
+              <a:rPr lang="en-US" sz="1200" dirty="0"/>
+              <a:t>Memory</a:t>
+            </a:r>
+          </a:p>
+          <a:p>
+            <a:pPr marL="742950" lvl="1" indent="-285750">
+              <a:buFont typeface="Wingdings" panose="05000000000000000000" pitchFamily="2" charset="2"/>
+              <a:buChar char="§"/>
+            </a:pPr>
+            <a:r>
+              <a:rPr lang="en-US" sz="1200" dirty="0"/>
+              <a:t>Additional Agents</a:t>
+            </a:r>
+          </a:p>
+          <a:p>
+            <a:pPr marL="285750" indent="-285750" algn="ctr">
+              <a:buFontTx/>
+              <a:buChar char="-"/>
+            </a:pPr>
+            <a:endParaRPr lang="en-GB" dirty="0"/>
+          </a:p>
+        </p:txBody>
+      </p:sp>
+      <p:sp>
+        <p:nvSpPr>
+          <p:cNvPr id="58" name="Arrow: Curved Down 57">
+            <a:extLst>
+              <a:ext uri="{FF2B5EF4-FFF2-40B4-BE49-F238E27FC236}">
+                <a16:creationId xmlns:a16="http://schemas.microsoft.com/office/drawing/2014/main" id="{DCECB89A-7380-FDE6-64B5-ADD7AB5D1561}"/>
+              </a:ext>
+            </a:extLst>
+          </p:cNvPr>
+          <p:cNvSpPr/>
+          <p:nvPr/>
+        </p:nvSpPr>
+        <p:spPr>
+          <a:xfrm rot="3344083">
+            <a:off x="3292865" y="1793854"/>
+            <a:ext cx="249254" cy="217085"/>
+          </a:xfrm>
+          <a:prstGeom prst="curvedDownArrow">
+            <a:avLst/>
+          </a:prstGeom>
+          <a:solidFill>
+            <a:schemeClr val="accent1">
+              <a:lumMod val="40000"/>
+              <a:lumOff val="60000"/>
+            </a:schemeClr>
+          </a:solidFill>
+        </p:spPr>
+        <p:style>
+          <a:lnRef idx="2">
+            <a:schemeClr val="accent1">
+              <a:shade val="15000"/>
+            </a:schemeClr>
+          </a:lnRef>
+          <a:fillRef idx="1">
+            <a:schemeClr val="accent1"/>
+          </a:fillRef>
+          <a:effectRef idx="0">
+            <a:schemeClr val="accent1"/>
+          </a:effectRef>
+          <a:fontRef idx="minor">
+            <a:schemeClr val="lt1"/>
+          </a:fontRef>
+        </p:style>
+        <p:txBody>
+          <a:bodyPr rtlCol="0" anchor="ctr"/>
+          <a:lstStyle/>
+          <a:p>
+            <a:pPr algn="ctr"/>
+            <a:endParaRPr lang="en-GB">
+              <a:solidFill>
+                <a:schemeClr val="tx1"/>
+              </a:solidFill>
+            </a:endParaRPr>
           </a:p>
         </p:txBody>
       </p:sp>
@@ -5752,6 +7440,7 @@
         <a:solidFill>
           <a:srgbClr val="0D1B2A"/>
         </a:solidFill>
+        <a:effectLst/>
       </p:bgPr>
     </p:bg>
     <p:spTree>
@@ -5792,6 +7481,13 @@
             <a:prstDash val="solid"/>
           </a:ln>
         </p:spPr>
+        <p:txBody>
+          <a:bodyPr/>
+          <a:lstStyle/>
+          <a:p>
+            <a:endParaRPr lang="en-GB"/>
+          </a:p>
+        </p:txBody>
       </p:sp>
       <p:sp>
         <p:nvSpPr>
@@ -5817,6 +7513,13 @@
             <a:prstDash val="solid"/>
           </a:ln>
         </p:spPr>
+        <p:txBody>
+          <a:bodyPr/>
+          <a:lstStyle/>
+          <a:p>
+            <a:endParaRPr lang="en-GB"/>
+          </a:p>
+        </p:txBody>
       </p:sp>
       <p:sp>
         <p:nvSpPr>
@@ -5842,6 +7545,13 @@
             <a:prstDash val="solid"/>
           </a:ln>
         </p:spPr>
+        <p:txBody>
+          <a:bodyPr/>
+          <a:lstStyle/>
+          <a:p>
+            <a:endParaRPr lang="en-GB"/>
+          </a:p>
+        </p:txBody>
       </p:sp>
       <p:sp>
         <p:nvSpPr>
@@ -5864,7 +7574,7 @@
           <a:bodyPr wrap="square" lIns="0" tIns="0" rIns="0" bIns="0" rtlCol="0" anchor="ctr"/>
           <a:lstStyle/>
           <a:p>
-            <a:pPr algn="ctr" indent="0" marL="0">
+            <a:pPr marL="0" indent="0" algn="ctr">
               <a:buNone/>
             </a:pPr>
             <a:r>
@@ -5903,7 +7613,7 @@
           <a:bodyPr wrap="square" lIns="0" tIns="0" rIns="0" bIns="0" rtlCol="0" anchor="ctr"/>
           <a:lstStyle/>
           <a:p>
-            <a:pPr algn="l" indent="0" marL="0">
+            <a:pPr marL="0" indent="0" algn="l">
               <a:buNone/>
             </a:pPr>
             <a:r>
@@ -5945,6 +7655,13 @@
             <a:prstDash val="solid"/>
           </a:ln>
         </p:spPr>
+        <p:txBody>
+          <a:bodyPr/>
+          <a:lstStyle/>
+          <a:p>
+            <a:endParaRPr lang="en-GB"/>
+          </a:p>
+        </p:txBody>
       </p:sp>
       <p:sp>
         <p:nvSpPr>
@@ -5970,6 +7687,13 @@
             <a:prstDash val="solid"/>
           </a:ln>
         </p:spPr>
+        <p:txBody>
+          <a:bodyPr/>
+          <a:lstStyle/>
+          <a:p>
+            <a:endParaRPr lang="en-GB"/>
+          </a:p>
+        </p:txBody>
       </p:sp>
       <p:sp>
         <p:nvSpPr>
@@ -5992,7 +7716,7 @@
           <a:bodyPr wrap="square" lIns="0" tIns="0" rIns="0" bIns="0" rtlCol="0" anchor="ctr"/>
           <a:lstStyle/>
           <a:p>
-            <a:pPr algn="l" indent="0" marL="0">
+            <a:pPr marL="0" indent="0" algn="l">
               <a:buNone/>
             </a:pPr>
             <a:r>
@@ -6034,6 +7758,13 @@
             <a:prstDash val="dash"/>
           </a:ln>
         </p:spPr>
+        <p:txBody>
+          <a:bodyPr/>
+          <a:lstStyle/>
+          <a:p>
+            <a:endParaRPr lang="en-GB"/>
+          </a:p>
+        </p:txBody>
       </p:sp>
       <p:sp>
         <p:nvSpPr>
@@ -6056,7 +7787,7 @@
           <a:bodyPr wrap="square" lIns="0" tIns="0" rIns="0" bIns="0" rtlCol="0" anchor="ctr"/>
           <a:lstStyle/>
           <a:p>
-            <a:pPr algn="ctr" indent="0" marL="0">
+            <a:pPr marL="0" indent="0" algn="ctr">
               <a:buNone/>
             </a:pPr>
             <a:r>
@@ -6095,7 +7826,7 @@
           <a:bodyPr wrap="square" lIns="0" tIns="0" rIns="0" bIns="0" rtlCol="0" anchor="ctr"/>
           <a:lstStyle/>
           <a:p>
-            <a:pPr algn="ctr" indent="0" marL="0">
+            <a:pPr marL="0" indent="0" algn="ctr">
               <a:buNone/>
             </a:pPr>
             <a:r>
@@ -6137,6 +7868,13 @@
             <a:prstDash val="solid"/>
           </a:ln>
         </p:spPr>
+        <p:txBody>
+          <a:bodyPr/>
+          <a:lstStyle/>
+          <a:p>
+            <a:endParaRPr lang="en-GB"/>
+          </a:p>
+        </p:txBody>
       </p:sp>
       <p:sp>
         <p:nvSpPr>
@@ -6159,7 +7897,7 @@
           <a:bodyPr wrap="square" lIns="0" tIns="0" rIns="0" bIns="0" rtlCol="0" anchor="ctr"/>
           <a:lstStyle/>
           <a:p>
-            <a:pPr algn="l" indent="0" marL="0">
+            <a:pPr marL="0" indent="0" algn="l">
               <a:buNone/>
             </a:pPr>
             <a:r>
@@ -6193,6 +7931,7 @@
         <a:solidFill>
           <a:srgbClr val="0D1B2A"/>
         </a:solidFill>
+        <a:effectLst/>
       </p:bgPr>
     </p:bg>
     <p:spTree>
@@ -6233,6 +7972,13 @@
             <a:prstDash val="solid"/>
           </a:ln>
         </p:spPr>
+        <p:txBody>
+          <a:bodyPr/>
+          <a:lstStyle/>
+          <a:p>
+            <a:endParaRPr lang="en-GB"/>
+          </a:p>
+        </p:txBody>
       </p:sp>
       <p:sp>
         <p:nvSpPr>
@@ -6258,6 +8004,13 @@
             <a:prstDash val="solid"/>
           </a:ln>
         </p:spPr>
+        <p:txBody>
+          <a:bodyPr/>
+          <a:lstStyle/>
+          <a:p>
+            <a:endParaRPr lang="en-GB"/>
+          </a:p>
+        </p:txBody>
       </p:sp>
       <p:sp>
         <p:nvSpPr>
@@ -6283,6 +8036,13 @@
             <a:prstDash val="solid"/>
           </a:ln>
         </p:spPr>
+        <p:txBody>
+          <a:bodyPr/>
+          <a:lstStyle/>
+          <a:p>
+            <a:endParaRPr lang="en-GB"/>
+          </a:p>
+        </p:txBody>
       </p:sp>
       <p:sp>
         <p:nvSpPr>
@@ -6305,7 +8065,7 @@
           <a:bodyPr wrap="square" lIns="0" tIns="0" rIns="0" bIns="0" rtlCol="0" anchor="ctr"/>
           <a:lstStyle/>
           <a:p>
-            <a:pPr algn="ctr" indent="0" marL="0">
+            <a:pPr marL="0" indent="0" algn="ctr">
               <a:buNone/>
             </a:pPr>
             <a:r>
@@ -6344,7 +8104,7 @@
           <a:bodyPr wrap="square" lIns="0" tIns="0" rIns="0" bIns="0" rtlCol="0" anchor="ctr"/>
           <a:lstStyle/>
           <a:p>
-            <a:pPr algn="l" indent="0" marL="0">
+            <a:pPr marL="0" indent="0" algn="l">
               <a:buNone/>
             </a:pPr>
             <a:r>
@@ -6388,13 +8148,20 @@
             <a:prstDash val="solid"/>
           </a:ln>
           <a:effectLst>
-            <a:outerShdw sx="100000" sy="100000" kx="0" ky="0" algn="bl" rotWithShape="0" blurRad="101600" dist="38100" dir="8100000">
+            <a:outerShdw blurRad="101600" dist="38100" dir="8100000" algn="bl" rotWithShape="0">
               <a:srgbClr val="000000">
                 <a:alpha val="25000"/>
               </a:srgbClr>
             </a:outerShdw>
           </a:effectLst>
         </p:spPr>
+        <p:txBody>
+          <a:bodyPr/>
+          <a:lstStyle/>
+          <a:p>
+            <a:endParaRPr lang="en-GB"/>
+          </a:p>
+        </p:txBody>
       </p:sp>
       <p:sp>
         <p:nvSpPr>
@@ -6422,6 +8189,13 @@
             <a:prstDash val="solid"/>
           </a:ln>
         </p:spPr>
+        <p:txBody>
+          <a:bodyPr/>
+          <a:lstStyle/>
+          <a:p>
+            <a:endParaRPr lang="en-GB"/>
+          </a:p>
+        </p:txBody>
       </p:sp>
       <p:sp>
         <p:nvSpPr>
@@ -6444,7 +8218,7 @@
           <a:bodyPr wrap="square" lIns="0" tIns="0" rIns="0" bIns="0" rtlCol="0" anchor="ctr"/>
           <a:lstStyle/>
           <a:p>
-            <a:pPr algn="ctr" indent="0" marL="0">
+            <a:pPr marL="0" indent="0" algn="ctr">
               <a:buNone/>
             </a:pPr>
             <a:r>
@@ -6483,7 +8257,7 @@
           <a:bodyPr wrap="square" lIns="0" tIns="0" rIns="0" bIns="0" rtlCol="0" anchor="ctr"/>
           <a:lstStyle/>
           <a:p>
-            <a:pPr algn="l" indent="0" marL="0">
+            <a:pPr marL="0" indent="0" algn="l">
               <a:buNone/>
             </a:pPr>
             <a:r>
@@ -6522,7 +8296,7 @@
           <a:bodyPr wrap="square" lIns="0" tIns="0" rIns="0" bIns="0" rtlCol="0" anchor="ctr"/>
           <a:lstStyle/>
           <a:p>
-            <a:pPr algn="l" indent="0" marL="0">
+            <a:pPr marL="0" indent="0" algn="l">
               <a:buNone/>
             </a:pPr>
             <a:r>
@@ -6566,13 +8340,20 @@
             <a:prstDash val="solid"/>
           </a:ln>
           <a:effectLst>
-            <a:outerShdw sx="100000" sy="100000" kx="0" ky="0" algn="bl" rotWithShape="0" blurRad="101600" dist="38100" dir="8100000">
+            <a:outerShdw blurRad="101600" dist="38100" dir="8100000" algn="bl" rotWithShape="0">
               <a:srgbClr val="000000">
                 <a:alpha val="25000"/>
               </a:srgbClr>
             </a:outerShdw>
           </a:effectLst>
         </p:spPr>
+        <p:txBody>
+          <a:bodyPr/>
+          <a:lstStyle/>
+          <a:p>
+            <a:endParaRPr lang="en-GB"/>
+          </a:p>
+        </p:txBody>
       </p:sp>
       <p:sp>
         <p:nvSpPr>
@@ -6600,6 +8381,13 @@
             <a:prstDash val="solid"/>
           </a:ln>
         </p:spPr>
+        <p:txBody>
+          <a:bodyPr/>
+          <a:lstStyle/>
+          <a:p>
+            <a:endParaRPr lang="en-GB"/>
+          </a:p>
+        </p:txBody>
       </p:sp>
       <p:sp>
         <p:nvSpPr>
@@ -6622,7 +8410,7 @@
           <a:bodyPr wrap="square" lIns="0" tIns="0" rIns="0" bIns="0" rtlCol="0" anchor="ctr"/>
           <a:lstStyle/>
           <a:p>
-            <a:pPr algn="ctr" indent="0" marL="0">
+            <a:pPr marL="0" indent="0" algn="ctr">
               <a:buNone/>
             </a:pPr>
             <a:r>
@@ -6661,7 +8449,7 @@
           <a:bodyPr wrap="square" lIns="0" tIns="0" rIns="0" bIns="0" rtlCol="0" anchor="ctr"/>
           <a:lstStyle/>
           <a:p>
-            <a:pPr algn="l" indent="0" marL="0">
+            <a:pPr marL="0" indent="0" algn="l">
               <a:buNone/>
             </a:pPr>
             <a:r>
@@ -6700,7 +8488,7 @@
           <a:bodyPr wrap="square" lIns="0" tIns="0" rIns="0" bIns="0" rtlCol="0" anchor="ctr"/>
           <a:lstStyle/>
           <a:p>
-            <a:pPr algn="l" indent="0" marL="0">
+            <a:pPr marL="0" indent="0" algn="l">
               <a:buNone/>
             </a:pPr>
             <a:r>
@@ -6744,13 +8532,20 @@
             <a:prstDash val="solid"/>
           </a:ln>
           <a:effectLst>
-            <a:outerShdw sx="100000" sy="100000" kx="0" ky="0" algn="bl" rotWithShape="0" blurRad="101600" dist="38100" dir="8100000">
+            <a:outerShdw blurRad="101600" dist="38100" dir="8100000" algn="bl" rotWithShape="0">
               <a:srgbClr val="000000">
                 <a:alpha val="25000"/>
               </a:srgbClr>
             </a:outerShdw>
           </a:effectLst>
         </p:spPr>
+        <p:txBody>
+          <a:bodyPr/>
+          <a:lstStyle/>
+          <a:p>
+            <a:endParaRPr lang="en-GB"/>
+          </a:p>
+        </p:txBody>
       </p:sp>
       <p:sp>
         <p:nvSpPr>
@@ -6778,6 +8573,13 @@
             <a:prstDash val="solid"/>
           </a:ln>
         </p:spPr>
+        <p:txBody>
+          <a:bodyPr/>
+          <a:lstStyle/>
+          <a:p>
+            <a:endParaRPr lang="en-GB"/>
+          </a:p>
+        </p:txBody>
       </p:sp>
       <p:sp>
         <p:nvSpPr>
@@ -6800,7 +8602,7 @@
           <a:bodyPr wrap="square" lIns="0" tIns="0" rIns="0" bIns="0" rtlCol="0" anchor="ctr"/>
           <a:lstStyle/>
           <a:p>
-            <a:pPr algn="ctr" indent="0" marL="0">
+            <a:pPr marL="0" indent="0" algn="ctr">
               <a:buNone/>
             </a:pPr>
             <a:r>
@@ -6839,7 +8641,7 @@
           <a:bodyPr wrap="square" lIns="0" tIns="0" rIns="0" bIns="0" rtlCol="0" anchor="ctr"/>
           <a:lstStyle/>
           <a:p>
-            <a:pPr algn="l" indent="0" marL="0">
+            <a:pPr marL="0" indent="0" algn="l">
               <a:buNone/>
             </a:pPr>
             <a:r>
@@ -6878,7 +8680,7 @@
           <a:bodyPr wrap="square" lIns="0" tIns="0" rIns="0" bIns="0" rtlCol="0" anchor="ctr"/>
           <a:lstStyle/>
           <a:p>
-            <a:pPr algn="l" indent="0" marL="0">
+            <a:pPr marL="0" indent="0" algn="l">
               <a:buNone/>
             </a:pPr>
             <a:r>
@@ -6922,13 +8724,20 @@
             <a:prstDash val="solid"/>
           </a:ln>
           <a:effectLst>
-            <a:outerShdw sx="100000" sy="100000" kx="0" ky="0" algn="bl" rotWithShape="0" blurRad="101600" dist="38100" dir="8100000">
+            <a:outerShdw blurRad="101600" dist="38100" dir="8100000" algn="bl" rotWithShape="0">
               <a:srgbClr val="000000">
                 <a:alpha val="25000"/>
               </a:srgbClr>
             </a:outerShdw>
           </a:effectLst>
         </p:spPr>
+        <p:txBody>
+          <a:bodyPr/>
+          <a:lstStyle/>
+          <a:p>
+            <a:endParaRPr lang="en-GB"/>
+          </a:p>
+        </p:txBody>
       </p:sp>
       <p:sp>
         <p:nvSpPr>
@@ -6956,6 +8765,13 @@
             <a:prstDash val="solid"/>
           </a:ln>
         </p:spPr>
+        <p:txBody>
+          <a:bodyPr/>
+          <a:lstStyle/>
+          <a:p>
+            <a:endParaRPr lang="en-GB"/>
+          </a:p>
+        </p:txBody>
       </p:sp>
       <p:sp>
         <p:nvSpPr>
@@ -6978,7 +8794,7 @@
           <a:bodyPr wrap="square" lIns="0" tIns="0" rIns="0" bIns="0" rtlCol="0" anchor="ctr"/>
           <a:lstStyle/>
           <a:p>
-            <a:pPr algn="ctr" indent="0" marL="0">
+            <a:pPr marL="0" indent="0" algn="ctr">
               <a:buNone/>
             </a:pPr>
             <a:r>
@@ -7017,7 +8833,7 @@
           <a:bodyPr wrap="square" lIns="0" tIns="0" rIns="0" bIns="0" rtlCol="0" anchor="ctr"/>
           <a:lstStyle/>
           <a:p>
-            <a:pPr algn="l" indent="0" marL="0">
+            <a:pPr marL="0" indent="0" algn="l">
               <a:buNone/>
             </a:pPr>
             <a:r>
@@ -7056,7 +8872,7 @@
           <a:bodyPr wrap="square" lIns="0" tIns="0" rIns="0" bIns="0" rtlCol="0" anchor="ctr"/>
           <a:lstStyle/>
           <a:p>
-            <a:pPr algn="l" indent="0" marL="0">
+            <a:pPr marL="0" indent="0" algn="l">
               <a:buNone/>
             </a:pPr>
             <a:r>
@@ -7100,13 +8916,20 @@
             <a:prstDash val="solid"/>
           </a:ln>
           <a:effectLst>
-            <a:outerShdw sx="100000" sy="100000" kx="0" ky="0" algn="bl" rotWithShape="0" blurRad="101600" dist="38100" dir="8100000">
+            <a:outerShdw blurRad="101600" dist="38100" dir="8100000" algn="bl" rotWithShape="0">
               <a:srgbClr val="000000">
                 <a:alpha val="25000"/>
               </a:srgbClr>
             </a:outerShdw>
           </a:effectLst>
         </p:spPr>
+        <p:txBody>
+          <a:bodyPr/>
+          <a:lstStyle/>
+          <a:p>
+            <a:endParaRPr lang="en-GB"/>
+          </a:p>
+        </p:txBody>
       </p:sp>
       <p:sp>
         <p:nvSpPr>
@@ -7134,6 +8957,13 @@
             <a:prstDash val="solid"/>
           </a:ln>
         </p:spPr>
+        <p:txBody>
+          <a:bodyPr/>
+          <a:lstStyle/>
+          <a:p>
+            <a:endParaRPr lang="en-GB"/>
+          </a:p>
+        </p:txBody>
       </p:sp>
       <p:sp>
         <p:nvSpPr>
@@ -7156,7 +8986,7 @@
           <a:bodyPr wrap="square" lIns="0" tIns="0" rIns="0" bIns="0" rtlCol="0" anchor="ctr"/>
           <a:lstStyle/>
           <a:p>
-            <a:pPr algn="ctr" indent="0" marL="0">
+            <a:pPr marL="0" indent="0" algn="ctr">
               <a:buNone/>
             </a:pPr>
             <a:r>
@@ -7195,7 +9025,7 @@
           <a:bodyPr wrap="square" lIns="0" tIns="0" rIns="0" bIns="0" rtlCol="0" anchor="ctr"/>
           <a:lstStyle/>
           <a:p>
-            <a:pPr algn="l" indent="0" marL="0">
+            <a:pPr marL="0" indent="0" algn="l">
               <a:buNone/>
             </a:pPr>
             <a:r>
@@ -7234,7 +9064,7 @@
           <a:bodyPr wrap="square" lIns="0" tIns="0" rIns="0" bIns="0" rtlCol="0" anchor="ctr"/>
           <a:lstStyle/>
           <a:p>
-            <a:pPr algn="l" indent="0" marL="0">
+            <a:pPr marL="0" indent="0" algn="l">
               <a:buNone/>
             </a:pPr>
             <a:r>
@@ -7276,6 +9106,13 @@
             <a:prstDash val="solid"/>
           </a:ln>
         </p:spPr>
+        <p:txBody>
+          <a:bodyPr/>
+          <a:lstStyle/>
+          <a:p>
+            <a:endParaRPr lang="en-GB"/>
+          </a:p>
+        </p:txBody>
       </p:sp>
       <p:sp>
         <p:nvSpPr>
@@ -7298,7 +9135,7 @@
           <a:bodyPr wrap="square" lIns="0" tIns="0" rIns="0" bIns="0" rtlCol="0" anchor="ctr"/>
           <a:lstStyle/>
           <a:p>
-            <a:pPr algn="l" indent="0" marL="0">
+            <a:pPr marL="0" indent="0" algn="l">
               <a:buNone/>
             </a:pPr>
             <a:r>
@@ -7332,6 +9169,7 @@
         <a:solidFill>
           <a:srgbClr val="0D1B2A"/>
         </a:solidFill>
+        <a:effectLst/>
       </p:bgPr>
     </p:bg>
     <p:spTree>
@@ -7372,6 +9210,13 @@
             <a:prstDash val="solid"/>
           </a:ln>
         </p:spPr>
+        <p:txBody>
+          <a:bodyPr/>
+          <a:lstStyle/>
+          <a:p>
+            <a:endParaRPr lang="en-GB"/>
+          </a:p>
+        </p:txBody>
       </p:sp>
       <p:sp>
         <p:nvSpPr>
@@ -7397,6 +9242,13 @@
             <a:prstDash val="solid"/>
           </a:ln>
         </p:spPr>
+        <p:txBody>
+          <a:bodyPr/>
+          <a:lstStyle/>
+          <a:p>
+            <a:endParaRPr lang="en-GB"/>
+          </a:p>
+        </p:txBody>
       </p:sp>
       <p:sp>
         <p:nvSpPr>
@@ -7422,6 +9274,13 @@
             <a:prstDash val="solid"/>
           </a:ln>
         </p:spPr>
+        <p:txBody>
+          <a:bodyPr/>
+          <a:lstStyle/>
+          <a:p>
+            <a:endParaRPr lang="en-GB"/>
+          </a:p>
+        </p:txBody>
       </p:sp>
       <p:sp>
         <p:nvSpPr>
@@ -7444,7 +9303,7 @@
           <a:bodyPr wrap="square" lIns="0" tIns="0" rIns="0" bIns="0" rtlCol="0" anchor="ctr"/>
           <a:lstStyle/>
           <a:p>
-            <a:pPr algn="ctr" indent="0" marL="0">
+            <a:pPr marL="0" indent="0" algn="ctr">
               <a:buNone/>
             </a:pPr>
             <a:r>
@@ -7483,7 +9342,7 @@
           <a:bodyPr wrap="square" lIns="0" tIns="0" rIns="0" bIns="0" rtlCol="0" anchor="ctr"/>
           <a:lstStyle/>
           <a:p>
-            <a:pPr algn="l" indent="0" marL="0">
+            <a:pPr marL="0" indent="0" algn="l">
               <a:buNone/>
             </a:pPr>
             <a:r>
@@ -7517,17 +9376,41 @@
         </p:nvGraphicFramePr>
         <p:xfrm>
           <a:off x="411480" y="822960"/>
-          <a:ext cx="8366760" cy="4041648"/>
+          <a:ext cx="7452360" cy="3621024"/>
         </p:xfrm>
         <a:graphic>
           <a:graphicData uri="http://schemas.openxmlformats.org/drawingml/2006/table">
             <a:tbl>
               <a:tblPr/>
               <a:tblGrid>
-                <a:gridCol w="2011680"/>
-                <a:gridCol w="1645920"/>
-                <a:gridCol w="2606040"/>
-                <a:gridCol w="1188720"/>
+                <a:gridCol w="2011680">
+                  <a:extLst>
+                    <a:ext uri="{9D8B030D-6E8A-4147-A177-3AD203B41FA5}">
+                      <a16:colId xmlns:a16="http://schemas.microsoft.com/office/drawing/2014/main" val="20000"/>
+                    </a:ext>
+                  </a:extLst>
+                </a:gridCol>
+                <a:gridCol w="1645920">
+                  <a:extLst>
+                    <a:ext uri="{9D8B030D-6E8A-4147-A177-3AD203B41FA5}">
+                      <a16:colId xmlns:a16="http://schemas.microsoft.com/office/drawing/2014/main" val="20001"/>
+                    </a:ext>
+                  </a:extLst>
+                </a:gridCol>
+                <a:gridCol w="2606040">
+                  <a:extLst>
+                    <a:ext uri="{9D8B030D-6E8A-4147-A177-3AD203B41FA5}">
+                      <a16:colId xmlns:a16="http://schemas.microsoft.com/office/drawing/2014/main" val="20002"/>
+                    </a:ext>
+                  </a:extLst>
+                </a:gridCol>
+                <a:gridCol w="1188720">
+                  <a:extLst>
+                    <a:ext uri="{9D8B030D-6E8A-4147-A177-3AD203B41FA5}">
+                      <a16:colId xmlns:a16="http://schemas.microsoft.com/office/drawing/2014/main" val="20003"/>
+                    </a:ext>
+                  </a:extLst>
+                </a:gridCol>
               </a:tblGrid>
               <a:tr h="301752">
                 <a:tc>
@@ -7535,7 +9418,7 @@
                     <a:bodyPr/>
                     <a:lstStyle/>
                     <a:p>
-                      <a:pPr algn="l" indent="0" marL="0">
+                      <a:pPr marL="0" indent="0" algn="l">
                         <a:buNone/>
                       </a:pPr>
                       <a:r>
@@ -7556,7 +9439,7 @@
                       </a:endParaRPr>
                     </a:p>
                   </a:txBody>
-                  <a:tcPr marL="91440" marR="91440" marT="45720" marB="45720">
+                  <a:tcPr>
                     <a:lnL w="6350" cap="flat" cmpd="sng" algn="ctr">
                       <a:solidFill>
                         <a:srgbClr val="1E3B55"/>
@@ -7603,7 +9486,7 @@
                     <a:bodyPr/>
                     <a:lstStyle/>
                     <a:p>
-                      <a:pPr algn="l" indent="0" marL="0">
+                      <a:pPr marL="0" indent="0" algn="l">
                         <a:buNone/>
                       </a:pPr>
                       <a:r>
@@ -7624,7 +9507,7 @@
                       </a:endParaRPr>
                     </a:p>
                   </a:txBody>
-                  <a:tcPr marL="91440" marR="91440" marT="45720" marB="45720">
+                  <a:tcPr>
                     <a:lnL w="6350" cap="flat" cmpd="sng" algn="ctr">
                       <a:solidFill>
                         <a:srgbClr val="1E3B55"/>
@@ -7671,7 +9554,7 @@
                     <a:bodyPr/>
                     <a:lstStyle/>
                     <a:p>
-                      <a:pPr algn="l" indent="0" marL="0">
+                      <a:pPr marL="0" indent="0" algn="l">
                         <a:buNone/>
                       </a:pPr>
                       <a:r>
@@ -7692,7 +9575,7 @@
                       </a:endParaRPr>
                     </a:p>
                   </a:txBody>
-                  <a:tcPr marL="91440" marR="91440" marT="45720" marB="45720">
+                  <a:tcPr>
                     <a:lnL w="6350" cap="flat" cmpd="sng" algn="ctr">
                       <a:solidFill>
                         <a:srgbClr val="1E3B55"/>
@@ -7739,7 +9622,7 @@
                     <a:bodyPr/>
                     <a:lstStyle/>
                     <a:p>
-                      <a:pPr algn="ctr" indent="0" marL="0">
+                      <a:pPr marL="0" indent="0" algn="ctr">
                         <a:buNone/>
                       </a:pPr>
                       <a:r>
@@ -7760,7 +9643,7 @@
                       </a:endParaRPr>
                     </a:p>
                   </a:txBody>
-                  <a:tcPr marL="91440" marR="91440" marT="45720" marB="45720">
+                  <a:tcPr>
                     <a:lnL w="6350" cap="flat" cmpd="sng" algn="ctr">
                       <a:solidFill>
                         <a:srgbClr val="1E3B55"/>
@@ -7802,6 +9685,11 @@
                     </a:solidFill>
                   </a:tcPr>
                 </a:tc>
+                <a:extLst>
+                  <a:ext uri="{0D108BD9-81ED-4DB2-BD59-A6C34878D82A}">
+                    <a16:rowId xmlns:a16="http://schemas.microsoft.com/office/drawing/2014/main" val="10000"/>
+                  </a:ext>
+                </a:extLst>
               </a:tr>
               <a:tr h="301752">
                 <a:tc>
@@ -7809,7 +9697,7 @@
                     <a:bodyPr/>
                     <a:lstStyle/>
                     <a:p>
-                      <a:pPr indent="0" marL="0">
+                      <a:pPr marL="0" indent="0">
                         <a:buNone/>
                       </a:pPr>
                       <a:r>
@@ -7830,7 +9718,7 @@
                       </a:endParaRPr>
                     </a:p>
                   </a:txBody>
-                  <a:tcPr marL="91440" marR="91440" marT="45720" marB="45720">
+                  <a:tcPr>
                     <a:lnL w="6350" cap="flat" cmpd="sng" algn="ctr">
                       <a:solidFill>
                         <a:srgbClr val="1E3B55"/>
@@ -7877,7 +9765,7 @@
                     <a:bodyPr/>
                     <a:lstStyle/>
                     <a:p>
-                      <a:pPr indent="0" marL="0">
+                      <a:pPr marL="0" indent="0">
                         <a:buNone/>
                       </a:pPr>
                       <a:r>
@@ -7898,7 +9786,7 @@
                       </a:endParaRPr>
                     </a:p>
                   </a:txBody>
-                  <a:tcPr marL="91440" marR="91440" marT="45720" marB="45720">
+                  <a:tcPr>
                     <a:lnL w="6350" cap="flat" cmpd="sng" algn="ctr">
                       <a:solidFill>
                         <a:srgbClr val="1E3B55"/>
@@ -7945,7 +9833,7 @@
                     <a:bodyPr/>
                     <a:lstStyle/>
                     <a:p>
-                      <a:pPr indent="0" marL="0">
+                      <a:pPr marL="0" indent="0">
                         <a:buNone/>
                       </a:pPr>
                       <a:r>
@@ -7966,7 +9854,7 @@
                       </a:endParaRPr>
                     </a:p>
                   </a:txBody>
-                  <a:tcPr marL="91440" marR="91440" marT="45720" marB="45720">
+                  <a:tcPr>
                     <a:lnL w="6350" cap="flat" cmpd="sng" algn="ctr">
                       <a:solidFill>
                         <a:srgbClr val="1E3B55"/>
@@ -8013,7 +9901,7 @@
                     <a:bodyPr/>
                     <a:lstStyle/>
                     <a:p>
-                      <a:pPr algn="ctr" indent="0" marL="0">
+                      <a:pPr marL="0" indent="0" algn="ctr">
                         <a:buNone/>
                       </a:pPr>
                       <a:r>
@@ -8034,7 +9922,7 @@
                       </a:endParaRPr>
                     </a:p>
                   </a:txBody>
-                  <a:tcPr marL="91440" marR="91440" marT="45720" marB="45720">
+                  <a:tcPr>
                     <a:lnL w="6350" cap="flat" cmpd="sng" algn="ctr">
                       <a:solidFill>
                         <a:srgbClr val="1E3B55"/>
@@ -8076,6 +9964,11 @@
                     </a:solidFill>
                   </a:tcPr>
                 </a:tc>
+                <a:extLst>
+                  <a:ext uri="{0D108BD9-81ED-4DB2-BD59-A6C34878D82A}">
+                    <a16:rowId xmlns:a16="http://schemas.microsoft.com/office/drawing/2014/main" val="10001"/>
+                  </a:ext>
+                </a:extLst>
               </a:tr>
               <a:tr h="301752">
                 <a:tc>
@@ -8083,7 +9976,7 @@
                     <a:bodyPr/>
                     <a:lstStyle/>
                     <a:p>
-                      <a:pPr indent="0" marL="0">
+                      <a:pPr marL="0" indent="0">
                         <a:buNone/>
                       </a:pPr>
                       <a:r>
@@ -8104,7 +9997,7 @@
                       </a:endParaRPr>
                     </a:p>
                   </a:txBody>
-                  <a:tcPr marL="91440" marR="91440" marT="45720" marB="45720">
+                  <a:tcPr>
                     <a:lnL w="6350" cap="flat" cmpd="sng" algn="ctr">
                       <a:solidFill>
                         <a:srgbClr val="1E3B55"/>
@@ -8151,7 +10044,7 @@
                     <a:bodyPr/>
                     <a:lstStyle/>
                     <a:p>
-                      <a:pPr indent="0" marL="0">
+                      <a:pPr marL="0" indent="0">
                         <a:buNone/>
                       </a:pPr>
                       <a:r>
@@ -8172,7 +10065,7 @@
                       </a:endParaRPr>
                     </a:p>
                   </a:txBody>
-                  <a:tcPr marL="91440" marR="91440" marT="45720" marB="45720">
+                  <a:tcPr>
                     <a:lnL w="6350" cap="flat" cmpd="sng" algn="ctr">
                       <a:solidFill>
                         <a:srgbClr val="1E3B55"/>
@@ -8219,7 +10112,7 @@
                     <a:bodyPr/>
                     <a:lstStyle/>
                     <a:p>
-                      <a:pPr indent="0" marL="0">
+                      <a:pPr marL="0" indent="0">
                         <a:buNone/>
                       </a:pPr>
                       <a:r>
@@ -8240,7 +10133,7 @@
                       </a:endParaRPr>
                     </a:p>
                   </a:txBody>
-                  <a:tcPr marL="91440" marR="91440" marT="45720" marB="45720">
+                  <a:tcPr>
                     <a:lnL w="6350" cap="flat" cmpd="sng" algn="ctr">
                       <a:solidFill>
                         <a:srgbClr val="1E3B55"/>
@@ -8287,7 +10180,7 @@
                     <a:bodyPr/>
                     <a:lstStyle/>
                     <a:p>
-                      <a:pPr algn="ctr" indent="0" marL="0">
+                      <a:pPr marL="0" indent="0" algn="ctr">
                         <a:buNone/>
                       </a:pPr>
                       <a:r>
@@ -8308,7 +10201,7 @@
                       </a:endParaRPr>
                     </a:p>
                   </a:txBody>
-                  <a:tcPr marL="91440" marR="91440" marT="45720" marB="45720">
+                  <a:tcPr>
                     <a:lnL w="6350" cap="flat" cmpd="sng" algn="ctr">
                       <a:solidFill>
                         <a:srgbClr val="1E3B55"/>
@@ -8350,6 +10243,11 @@
                     </a:solidFill>
                   </a:tcPr>
                 </a:tc>
+                <a:extLst>
+                  <a:ext uri="{0D108BD9-81ED-4DB2-BD59-A6C34878D82A}">
+                    <a16:rowId xmlns:a16="http://schemas.microsoft.com/office/drawing/2014/main" val="10002"/>
+                  </a:ext>
+                </a:extLst>
               </a:tr>
               <a:tr h="301752">
                 <a:tc>
@@ -8357,7 +10255,7 @@
                     <a:bodyPr/>
                     <a:lstStyle/>
                     <a:p>
-                      <a:pPr indent="0" marL="0">
+                      <a:pPr marL="0" indent="0">
                         <a:buNone/>
                       </a:pPr>
                       <a:r>
@@ -8378,7 +10276,7 @@
                       </a:endParaRPr>
                     </a:p>
                   </a:txBody>
-                  <a:tcPr marL="91440" marR="91440" marT="45720" marB="45720">
+                  <a:tcPr>
                     <a:lnL w="6350" cap="flat" cmpd="sng" algn="ctr">
                       <a:solidFill>
                         <a:srgbClr val="1E3B55"/>
@@ -8425,7 +10323,7 @@
                     <a:bodyPr/>
                     <a:lstStyle/>
                     <a:p>
-                      <a:pPr indent="0" marL="0">
+                      <a:pPr marL="0" indent="0">
                         <a:buNone/>
                       </a:pPr>
                       <a:r>
@@ -8446,7 +10344,7 @@
                       </a:endParaRPr>
                     </a:p>
                   </a:txBody>
-                  <a:tcPr marL="91440" marR="91440" marT="45720" marB="45720">
+                  <a:tcPr>
                     <a:lnL w="6350" cap="flat" cmpd="sng" algn="ctr">
                       <a:solidFill>
                         <a:srgbClr val="1E3B55"/>
@@ -8493,7 +10391,7 @@
                     <a:bodyPr/>
                     <a:lstStyle/>
                     <a:p>
-                      <a:pPr indent="0" marL="0">
+                      <a:pPr marL="0" indent="0">
                         <a:buNone/>
                       </a:pPr>
                       <a:r>
@@ -8514,7 +10412,7 @@
                       </a:endParaRPr>
                     </a:p>
                   </a:txBody>
-                  <a:tcPr marL="91440" marR="91440" marT="45720" marB="45720">
+                  <a:tcPr>
                     <a:lnL w="6350" cap="flat" cmpd="sng" algn="ctr">
                       <a:solidFill>
                         <a:srgbClr val="1E3B55"/>
@@ -8561,7 +10459,7 @@
                     <a:bodyPr/>
                     <a:lstStyle/>
                     <a:p>
-                      <a:pPr algn="ctr" indent="0" marL="0">
+                      <a:pPr marL="0" indent="0" algn="ctr">
                         <a:buNone/>
                       </a:pPr>
                       <a:r>
@@ -8582,7 +10480,7 @@
                       </a:endParaRPr>
                     </a:p>
                   </a:txBody>
-                  <a:tcPr marL="91440" marR="91440" marT="45720" marB="45720">
+                  <a:tcPr>
                     <a:lnL w="6350" cap="flat" cmpd="sng" algn="ctr">
                       <a:solidFill>
                         <a:srgbClr val="1E3B55"/>
@@ -8624,6 +10522,11 @@
                     </a:solidFill>
                   </a:tcPr>
                 </a:tc>
+                <a:extLst>
+                  <a:ext uri="{0D108BD9-81ED-4DB2-BD59-A6C34878D82A}">
+                    <a16:rowId xmlns:a16="http://schemas.microsoft.com/office/drawing/2014/main" val="10003"/>
+                  </a:ext>
+                </a:extLst>
               </a:tr>
               <a:tr h="301752">
                 <a:tc>
@@ -8631,7 +10534,7 @@
                     <a:bodyPr/>
                     <a:lstStyle/>
                     <a:p>
-                      <a:pPr indent="0" marL="0">
+                      <a:pPr marL="0" indent="0">
                         <a:buNone/>
                       </a:pPr>
                       <a:r>
@@ -8652,7 +10555,7 @@
                       </a:endParaRPr>
                     </a:p>
                   </a:txBody>
-                  <a:tcPr marL="91440" marR="91440" marT="45720" marB="45720">
+                  <a:tcPr>
                     <a:lnL w="6350" cap="flat" cmpd="sng" algn="ctr">
                       <a:solidFill>
                         <a:srgbClr val="1E3B55"/>
@@ -8699,7 +10602,7 @@
                     <a:bodyPr/>
                     <a:lstStyle/>
                     <a:p>
-                      <a:pPr indent="0" marL="0">
+                      <a:pPr marL="0" indent="0">
                         <a:buNone/>
                       </a:pPr>
                       <a:r>
@@ -8720,7 +10623,7 @@
                       </a:endParaRPr>
                     </a:p>
                   </a:txBody>
-                  <a:tcPr marL="91440" marR="91440" marT="45720" marB="45720">
+                  <a:tcPr>
                     <a:lnL w="6350" cap="flat" cmpd="sng" algn="ctr">
                       <a:solidFill>
                         <a:srgbClr val="1E3B55"/>
@@ -8767,7 +10670,7 @@
                     <a:bodyPr/>
                     <a:lstStyle/>
                     <a:p>
-                      <a:pPr indent="0" marL="0">
+                      <a:pPr marL="0" indent="0">
                         <a:buNone/>
                       </a:pPr>
                       <a:r>
@@ -8788,7 +10691,7 @@
                       </a:endParaRPr>
                     </a:p>
                   </a:txBody>
-                  <a:tcPr marL="91440" marR="91440" marT="45720" marB="45720">
+                  <a:tcPr>
                     <a:lnL w="6350" cap="flat" cmpd="sng" algn="ctr">
                       <a:solidFill>
                         <a:srgbClr val="1E3B55"/>
@@ -8835,7 +10738,7 @@
                     <a:bodyPr/>
                     <a:lstStyle/>
                     <a:p>
-                      <a:pPr algn="ctr" indent="0" marL="0">
+                      <a:pPr marL="0" indent="0" algn="ctr">
                         <a:buNone/>
                       </a:pPr>
                       <a:r>
@@ -8856,7 +10759,7 @@
                       </a:endParaRPr>
                     </a:p>
                   </a:txBody>
-                  <a:tcPr marL="91440" marR="91440" marT="45720" marB="45720">
+                  <a:tcPr>
                     <a:lnL w="6350" cap="flat" cmpd="sng" algn="ctr">
                       <a:solidFill>
                         <a:srgbClr val="1E3B55"/>
@@ -8898,6 +10801,11 @@
                     </a:solidFill>
                   </a:tcPr>
                 </a:tc>
+                <a:extLst>
+                  <a:ext uri="{0D108BD9-81ED-4DB2-BD59-A6C34878D82A}">
+                    <a16:rowId xmlns:a16="http://schemas.microsoft.com/office/drawing/2014/main" val="10004"/>
+                  </a:ext>
+                </a:extLst>
               </a:tr>
               <a:tr h="301752">
                 <a:tc>
@@ -8905,7 +10813,7 @@
                     <a:bodyPr/>
                     <a:lstStyle/>
                     <a:p>
-                      <a:pPr indent="0" marL="0">
+                      <a:pPr marL="0" indent="0">
                         <a:buNone/>
                       </a:pPr>
                       <a:r>
@@ -8926,7 +10834,7 @@
                       </a:endParaRPr>
                     </a:p>
                   </a:txBody>
-                  <a:tcPr marL="91440" marR="91440" marT="45720" marB="45720">
+                  <a:tcPr>
                     <a:lnL w="6350" cap="flat" cmpd="sng" algn="ctr">
                       <a:solidFill>
                         <a:srgbClr val="1E3B55"/>
@@ -8973,7 +10881,7 @@
                     <a:bodyPr/>
                     <a:lstStyle/>
                     <a:p>
-                      <a:pPr indent="0" marL="0">
+                      <a:pPr marL="0" indent="0">
                         <a:buNone/>
                       </a:pPr>
                       <a:r>
@@ -8994,7 +10902,7 @@
                       </a:endParaRPr>
                     </a:p>
                   </a:txBody>
-                  <a:tcPr marL="91440" marR="91440" marT="45720" marB="45720">
+                  <a:tcPr>
                     <a:lnL w="6350" cap="flat" cmpd="sng" algn="ctr">
                       <a:solidFill>
                         <a:srgbClr val="1E3B55"/>
@@ -9041,7 +10949,7 @@
                     <a:bodyPr/>
                     <a:lstStyle/>
                     <a:p>
-                      <a:pPr indent="0" marL="0">
+                      <a:pPr marL="0" indent="0">
                         <a:buNone/>
                       </a:pPr>
                       <a:r>
@@ -9062,7 +10970,7 @@
                       </a:endParaRPr>
                     </a:p>
                   </a:txBody>
-                  <a:tcPr marL="91440" marR="91440" marT="45720" marB="45720">
+                  <a:tcPr>
                     <a:lnL w="6350" cap="flat" cmpd="sng" algn="ctr">
                       <a:solidFill>
                         <a:srgbClr val="1E3B55"/>
@@ -9109,7 +11017,7 @@
                     <a:bodyPr/>
                     <a:lstStyle/>
                     <a:p>
-                      <a:pPr algn="ctr" indent="0" marL="0">
+                      <a:pPr marL="0" indent="0" algn="ctr">
                         <a:buNone/>
                       </a:pPr>
                       <a:r>
@@ -9130,7 +11038,7 @@
                       </a:endParaRPr>
                     </a:p>
                   </a:txBody>
-                  <a:tcPr marL="91440" marR="91440" marT="45720" marB="45720">
+                  <a:tcPr>
                     <a:lnL w="6350" cap="flat" cmpd="sng" algn="ctr">
                       <a:solidFill>
                         <a:srgbClr val="1E3B55"/>
@@ -9172,6 +11080,11 @@
                     </a:solidFill>
                   </a:tcPr>
                 </a:tc>
+                <a:extLst>
+                  <a:ext uri="{0D108BD9-81ED-4DB2-BD59-A6C34878D82A}">
+                    <a16:rowId xmlns:a16="http://schemas.microsoft.com/office/drawing/2014/main" val="10005"/>
+                  </a:ext>
+                </a:extLst>
               </a:tr>
               <a:tr h="301752">
                 <a:tc>
@@ -9179,7 +11092,7 @@
                     <a:bodyPr/>
                     <a:lstStyle/>
                     <a:p>
-                      <a:pPr indent="0" marL="0">
+                      <a:pPr marL="0" indent="0">
                         <a:buNone/>
                       </a:pPr>
                       <a:r>
@@ -9200,7 +11113,7 @@
                       </a:endParaRPr>
                     </a:p>
                   </a:txBody>
-                  <a:tcPr marL="91440" marR="91440" marT="45720" marB="45720">
+                  <a:tcPr>
                     <a:lnL w="6350" cap="flat" cmpd="sng" algn="ctr">
                       <a:solidFill>
                         <a:srgbClr val="1E3B55"/>
@@ -9247,7 +11160,7 @@
                     <a:bodyPr/>
                     <a:lstStyle/>
                     <a:p>
-                      <a:pPr indent="0" marL="0">
+                      <a:pPr marL="0" indent="0">
                         <a:buNone/>
                       </a:pPr>
                       <a:r>
@@ -9268,7 +11181,7 @@
                       </a:endParaRPr>
                     </a:p>
                   </a:txBody>
-                  <a:tcPr marL="91440" marR="91440" marT="45720" marB="45720">
+                  <a:tcPr>
                     <a:lnL w="6350" cap="flat" cmpd="sng" algn="ctr">
                       <a:solidFill>
                         <a:srgbClr val="1E3B55"/>
@@ -9315,7 +11228,7 @@
                     <a:bodyPr/>
                     <a:lstStyle/>
                     <a:p>
-                      <a:pPr indent="0" marL="0">
+                      <a:pPr marL="0" indent="0">
                         <a:buNone/>
                       </a:pPr>
                       <a:r>
@@ -9336,7 +11249,7 @@
                       </a:endParaRPr>
                     </a:p>
                   </a:txBody>
-                  <a:tcPr marL="91440" marR="91440" marT="45720" marB="45720">
+                  <a:tcPr>
                     <a:lnL w="6350" cap="flat" cmpd="sng" algn="ctr">
                       <a:solidFill>
                         <a:srgbClr val="1E3B55"/>
@@ -9383,7 +11296,7 @@
                     <a:bodyPr/>
                     <a:lstStyle/>
                     <a:p>
-                      <a:pPr algn="ctr" indent="0" marL="0">
+                      <a:pPr marL="0" indent="0" algn="ctr">
                         <a:buNone/>
                       </a:pPr>
                       <a:r>
@@ -9404,7 +11317,7 @@
                       </a:endParaRPr>
                     </a:p>
                   </a:txBody>
-                  <a:tcPr marL="91440" marR="91440" marT="45720" marB="45720">
+                  <a:tcPr>
                     <a:lnL w="6350" cap="flat" cmpd="sng" algn="ctr">
                       <a:solidFill>
                         <a:srgbClr val="1E3B55"/>
@@ -9446,6 +11359,11 @@
                     </a:solidFill>
                   </a:tcPr>
                 </a:tc>
+                <a:extLst>
+                  <a:ext uri="{0D108BD9-81ED-4DB2-BD59-A6C34878D82A}">
+                    <a16:rowId xmlns:a16="http://schemas.microsoft.com/office/drawing/2014/main" val="10006"/>
+                  </a:ext>
+                </a:extLst>
               </a:tr>
               <a:tr h="301752">
                 <a:tc>
@@ -9453,7 +11371,7 @@
                     <a:bodyPr/>
                     <a:lstStyle/>
                     <a:p>
-                      <a:pPr indent="0" marL="0">
+                      <a:pPr marL="0" indent="0">
                         <a:buNone/>
                       </a:pPr>
                       <a:r>
@@ -9474,7 +11392,7 @@
                       </a:endParaRPr>
                     </a:p>
                   </a:txBody>
-                  <a:tcPr marL="91440" marR="91440" marT="45720" marB="45720">
+                  <a:tcPr>
                     <a:lnL w="6350" cap="flat" cmpd="sng" algn="ctr">
                       <a:solidFill>
                         <a:srgbClr val="1E3B55"/>
@@ -9521,7 +11439,7 @@
                     <a:bodyPr/>
                     <a:lstStyle/>
                     <a:p>
-                      <a:pPr indent="0" marL="0">
+                      <a:pPr marL="0" indent="0">
                         <a:buNone/>
                       </a:pPr>
                       <a:r>
@@ -9542,7 +11460,7 @@
                       </a:endParaRPr>
                     </a:p>
                   </a:txBody>
-                  <a:tcPr marL="91440" marR="91440" marT="45720" marB="45720">
+                  <a:tcPr>
                     <a:lnL w="6350" cap="flat" cmpd="sng" algn="ctr">
                       <a:solidFill>
                         <a:srgbClr val="1E3B55"/>
@@ -9589,7 +11507,7 @@
                     <a:bodyPr/>
                     <a:lstStyle/>
                     <a:p>
-                      <a:pPr indent="0" marL="0">
+                      <a:pPr marL="0" indent="0">
                         <a:buNone/>
                       </a:pPr>
                       <a:r>
@@ -9610,7 +11528,7 @@
                       </a:endParaRPr>
                     </a:p>
                   </a:txBody>
-                  <a:tcPr marL="91440" marR="91440" marT="45720" marB="45720">
+                  <a:tcPr>
                     <a:lnL w="6350" cap="flat" cmpd="sng" algn="ctr">
                       <a:solidFill>
                         <a:srgbClr val="1E3B55"/>
@@ -9657,7 +11575,7 @@
                     <a:bodyPr/>
                     <a:lstStyle/>
                     <a:p>
-                      <a:pPr algn="ctr" indent="0" marL="0">
+                      <a:pPr marL="0" indent="0" algn="ctr">
                         <a:buNone/>
                       </a:pPr>
                       <a:r>
@@ -9678,7 +11596,7 @@
                       </a:endParaRPr>
                     </a:p>
                   </a:txBody>
-                  <a:tcPr marL="91440" marR="91440" marT="45720" marB="45720">
+                  <a:tcPr>
                     <a:lnL w="6350" cap="flat" cmpd="sng" algn="ctr">
                       <a:solidFill>
                         <a:srgbClr val="1E3B55"/>
@@ -9720,6 +11638,11 @@
                     </a:solidFill>
                   </a:tcPr>
                 </a:tc>
+                <a:extLst>
+                  <a:ext uri="{0D108BD9-81ED-4DB2-BD59-A6C34878D82A}">
+                    <a16:rowId xmlns:a16="http://schemas.microsoft.com/office/drawing/2014/main" val="10007"/>
+                  </a:ext>
+                </a:extLst>
               </a:tr>
               <a:tr h="301752">
                 <a:tc>
@@ -9727,7 +11650,7 @@
                     <a:bodyPr/>
                     <a:lstStyle/>
                     <a:p>
-                      <a:pPr indent="0" marL="0">
+                      <a:pPr marL="0" indent="0">
                         <a:buNone/>
                       </a:pPr>
                       <a:r>
@@ -9748,7 +11671,7 @@
                       </a:endParaRPr>
                     </a:p>
                   </a:txBody>
-                  <a:tcPr marL="91440" marR="91440" marT="45720" marB="45720">
+                  <a:tcPr>
                     <a:lnL w="6350" cap="flat" cmpd="sng" algn="ctr">
                       <a:solidFill>
                         <a:srgbClr val="1E3B55"/>
@@ -9795,7 +11718,7 @@
                     <a:bodyPr/>
                     <a:lstStyle/>
                     <a:p>
-                      <a:pPr indent="0" marL="0">
+                      <a:pPr marL="0" indent="0">
                         <a:buNone/>
                       </a:pPr>
                       <a:r>
@@ -9816,7 +11739,7 @@
                       </a:endParaRPr>
                     </a:p>
                   </a:txBody>
-                  <a:tcPr marL="91440" marR="91440" marT="45720" marB="45720">
+                  <a:tcPr>
                     <a:lnL w="6350" cap="flat" cmpd="sng" algn="ctr">
                       <a:solidFill>
                         <a:srgbClr val="1E3B55"/>
@@ -9863,7 +11786,7 @@
                     <a:bodyPr/>
                     <a:lstStyle/>
                     <a:p>
-                      <a:pPr indent="0" marL="0">
+                      <a:pPr marL="0" indent="0">
                         <a:buNone/>
                       </a:pPr>
                       <a:r>
@@ -9884,7 +11807,7 @@
                       </a:endParaRPr>
                     </a:p>
                   </a:txBody>
-                  <a:tcPr marL="91440" marR="91440" marT="45720" marB="45720">
+                  <a:tcPr>
                     <a:lnL w="6350" cap="flat" cmpd="sng" algn="ctr">
                       <a:solidFill>
                         <a:srgbClr val="1E3B55"/>
@@ -9931,7 +11854,7 @@
                     <a:bodyPr/>
                     <a:lstStyle/>
                     <a:p>
-                      <a:pPr algn="ctr" indent="0" marL="0">
+                      <a:pPr marL="0" indent="0" algn="ctr">
                         <a:buNone/>
                       </a:pPr>
                       <a:r>
@@ -9952,7 +11875,7 @@
                       </a:endParaRPr>
                     </a:p>
                   </a:txBody>
-                  <a:tcPr marL="91440" marR="91440" marT="45720" marB="45720">
+                  <a:tcPr>
                     <a:lnL w="6350" cap="flat" cmpd="sng" algn="ctr">
                       <a:solidFill>
                         <a:srgbClr val="1E3B55"/>
@@ -9994,6 +11917,11 @@
                     </a:solidFill>
                   </a:tcPr>
                 </a:tc>
+                <a:extLst>
+                  <a:ext uri="{0D108BD9-81ED-4DB2-BD59-A6C34878D82A}">
+                    <a16:rowId xmlns:a16="http://schemas.microsoft.com/office/drawing/2014/main" val="10008"/>
+                  </a:ext>
+                </a:extLst>
               </a:tr>
               <a:tr h="301752">
                 <a:tc>
@@ -10001,7 +11929,7 @@
                     <a:bodyPr/>
                     <a:lstStyle/>
                     <a:p>
-                      <a:pPr indent="0" marL="0">
+                      <a:pPr marL="0" indent="0">
                         <a:buNone/>
                       </a:pPr>
                       <a:r>
@@ -10022,7 +11950,7 @@
                       </a:endParaRPr>
                     </a:p>
                   </a:txBody>
-                  <a:tcPr marL="91440" marR="91440" marT="45720" marB="45720">
+                  <a:tcPr>
                     <a:lnL w="6350" cap="flat" cmpd="sng" algn="ctr">
                       <a:solidFill>
                         <a:srgbClr val="1E3B55"/>
@@ -10069,7 +11997,7 @@
                     <a:bodyPr/>
                     <a:lstStyle/>
                     <a:p>
-                      <a:pPr indent="0" marL="0">
+                      <a:pPr marL="0" indent="0">
                         <a:buNone/>
                       </a:pPr>
                       <a:r>
@@ -10090,7 +12018,7 @@
                       </a:endParaRPr>
                     </a:p>
                   </a:txBody>
-                  <a:tcPr marL="91440" marR="91440" marT="45720" marB="45720">
+                  <a:tcPr>
                     <a:lnL w="6350" cap="flat" cmpd="sng" algn="ctr">
                       <a:solidFill>
                         <a:srgbClr val="1E3B55"/>
@@ -10137,7 +12065,7 @@
                     <a:bodyPr/>
                     <a:lstStyle/>
                     <a:p>
-                      <a:pPr indent="0" marL="0">
+                      <a:pPr marL="0" indent="0">
                         <a:buNone/>
                       </a:pPr>
                       <a:r>
@@ -10158,7 +12086,7 @@
                       </a:endParaRPr>
                     </a:p>
                   </a:txBody>
-                  <a:tcPr marL="91440" marR="91440" marT="45720" marB="45720">
+                  <a:tcPr>
                     <a:lnL w="6350" cap="flat" cmpd="sng" algn="ctr">
                       <a:solidFill>
                         <a:srgbClr val="1E3B55"/>
@@ -10205,7 +12133,7 @@
                     <a:bodyPr/>
                     <a:lstStyle/>
                     <a:p>
-                      <a:pPr algn="ctr" indent="0" marL="0">
+                      <a:pPr marL="0" indent="0" algn="ctr">
                         <a:buNone/>
                       </a:pPr>
                       <a:r>
@@ -10226,7 +12154,7 @@
                       </a:endParaRPr>
                     </a:p>
                   </a:txBody>
-                  <a:tcPr marL="91440" marR="91440" marT="45720" marB="45720">
+                  <a:tcPr>
                     <a:lnL w="6350" cap="flat" cmpd="sng" algn="ctr">
                       <a:solidFill>
                         <a:srgbClr val="1E3B55"/>
@@ -10268,6 +12196,11 @@
                     </a:solidFill>
                   </a:tcPr>
                 </a:tc>
+                <a:extLst>
+                  <a:ext uri="{0D108BD9-81ED-4DB2-BD59-A6C34878D82A}">
+                    <a16:rowId xmlns:a16="http://schemas.microsoft.com/office/drawing/2014/main" val="10009"/>
+                  </a:ext>
+                </a:extLst>
               </a:tr>
               <a:tr h="301752">
                 <a:tc>
@@ -10275,7 +12208,7 @@
                     <a:bodyPr/>
                     <a:lstStyle/>
                     <a:p>
-                      <a:pPr indent="0" marL="0">
+                      <a:pPr marL="0" indent="0">
                         <a:buNone/>
                       </a:pPr>
                       <a:r>
@@ -10296,7 +12229,7 @@
                       </a:endParaRPr>
                     </a:p>
                   </a:txBody>
-                  <a:tcPr marL="91440" marR="91440" marT="45720" marB="45720">
+                  <a:tcPr>
                     <a:lnL w="6350" cap="flat" cmpd="sng" algn="ctr">
                       <a:solidFill>
                         <a:srgbClr val="1E3B55"/>
@@ -10343,7 +12276,7 @@
                     <a:bodyPr/>
                     <a:lstStyle/>
                     <a:p>
-                      <a:pPr indent="0" marL="0">
+                      <a:pPr marL="0" indent="0">
                         <a:buNone/>
                       </a:pPr>
                       <a:r>
@@ -10364,7 +12297,7 @@
                       </a:endParaRPr>
                     </a:p>
                   </a:txBody>
-                  <a:tcPr marL="91440" marR="91440" marT="45720" marB="45720">
+                  <a:tcPr>
                     <a:lnL w="6350" cap="flat" cmpd="sng" algn="ctr">
                       <a:solidFill>
                         <a:srgbClr val="1E3B55"/>
@@ -10411,7 +12344,7 @@
                     <a:bodyPr/>
                     <a:lstStyle/>
                     <a:p>
-                      <a:pPr indent="0" marL="0">
+                      <a:pPr marL="0" indent="0">
                         <a:buNone/>
                       </a:pPr>
                       <a:r>
@@ -10432,7 +12365,7 @@
                       </a:endParaRPr>
                     </a:p>
                   </a:txBody>
-                  <a:tcPr marL="91440" marR="91440" marT="45720" marB="45720">
+                  <a:tcPr>
                     <a:lnL w="6350" cap="flat" cmpd="sng" algn="ctr">
                       <a:solidFill>
                         <a:srgbClr val="1E3B55"/>
@@ -10479,7 +12412,7 @@
                     <a:bodyPr/>
                     <a:lstStyle/>
                     <a:p>
-                      <a:pPr algn="ctr" indent="0" marL="0">
+                      <a:pPr marL="0" indent="0" algn="ctr">
                         <a:buNone/>
                       </a:pPr>
                       <a:r>
@@ -10500,7 +12433,7 @@
                       </a:endParaRPr>
                     </a:p>
                   </a:txBody>
-                  <a:tcPr marL="91440" marR="91440" marT="45720" marB="45720">
+                  <a:tcPr>
                     <a:lnL w="6350" cap="flat" cmpd="sng" algn="ctr">
                       <a:solidFill>
                         <a:srgbClr val="1E3B55"/>
@@ -10542,6 +12475,11 @@
                     </a:solidFill>
                   </a:tcPr>
                 </a:tc>
+                <a:extLst>
+                  <a:ext uri="{0D108BD9-81ED-4DB2-BD59-A6C34878D82A}">
+                    <a16:rowId xmlns:a16="http://schemas.microsoft.com/office/drawing/2014/main" val="10010"/>
+                  </a:ext>
+                </a:extLst>
               </a:tr>
               <a:tr h="301752">
                 <a:tc>
@@ -10549,7 +12487,7 @@
                     <a:bodyPr/>
                     <a:lstStyle/>
                     <a:p>
-                      <a:pPr indent="0" marL="0">
+                      <a:pPr marL="0" indent="0">
                         <a:buNone/>
                       </a:pPr>
                       <a:r>
@@ -10570,7 +12508,7 @@
                       </a:endParaRPr>
                     </a:p>
                   </a:txBody>
-                  <a:tcPr marL="91440" marR="91440" marT="45720" marB="45720">
+                  <a:tcPr>
                     <a:lnL w="6350" cap="flat" cmpd="sng" algn="ctr">
                       <a:solidFill>
                         <a:srgbClr val="1E3B55"/>
@@ -10617,7 +12555,7 @@
                     <a:bodyPr/>
                     <a:lstStyle/>
                     <a:p>
-                      <a:pPr indent="0" marL="0">
+                      <a:pPr marL="0" indent="0">
                         <a:buNone/>
                       </a:pPr>
                       <a:r>
@@ -10638,7 +12576,7 @@
                       </a:endParaRPr>
                     </a:p>
                   </a:txBody>
-                  <a:tcPr marL="91440" marR="91440" marT="45720" marB="45720">
+                  <a:tcPr>
                     <a:lnL w="6350" cap="flat" cmpd="sng" algn="ctr">
                       <a:solidFill>
                         <a:srgbClr val="1E3B55"/>
@@ -10685,7 +12623,7 @@
                     <a:bodyPr/>
                     <a:lstStyle/>
                     <a:p>
-                      <a:pPr indent="0" marL="0">
+                      <a:pPr marL="0" indent="0">
                         <a:buNone/>
                       </a:pPr>
                       <a:r>
@@ -10706,7 +12644,7 @@
                       </a:endParaRPr>
                     </a:p>
                   </a:txBody>
-                  <a:tcPr marL="91440" marR="91440" marT="45720" marB="45720">
+                  <a:tcPr>
                     <a:lnL w="6350" cap="flat" cmpd="sng" algn="ctr">
                       <a:solidFill>
                         <a:srgbClr val="1E3B55"/>
@@ -10753,7 +12691,7 @@
                     <a:bodyPr/>
                     <a:lstStyle/>
                     <a:p>
-                      <a:pPr algn="ctr" indent="0" marL="0">
+                      <a:pPr marL="0" indent="0" algn="ctr">
                         <a:buNone/>
                       </a:pPr>
                       <a:r>
@@ -10774,7 +12712,7 @@
                       </a:endParaRPr>
                     </a:p>
                   </a:txBody>
-                  <a:tcPr marL="91440" marR="91440" marT="45720" marB="45720">
+                  <a:tcPr>
                     <a:lnL w="6350" cap="flat" cmpd="sng" algn="ctr">
                       <a:solidFill>
                         <a:srgbClr val="1E3B55"/>
@@ -10816,6 +12754,11 @@
                     </a:solidFill>
                   </a:tcPr>
                 </a:tc>
+                <a:extLst>
+                  <a:ext uri="{0D108BD9-81ED-4DB2-BD59-A6C34878D82A}">
+                    <a16:rowId xmlns:a16="http://schemas.microsoft.com/office/drawing/2014/main" val="10011"/>
+                  </a:ext>
+                </a:extLst>
               </a:tr>
             </a:tbl>
           </a:graphicData>
@@ -10845,10 +12788,17 @@
             <a:prstDash val="solid"/>
           </a:ln>
         </p:spPr>
-      </p:sp>
-      <p:sp>
-        <p:nvSpPr>
-          <p:cNvPr id="9" name="Text 6"/>
+        <p:txBody>
+          <a:bodyPr/>
+          <a:lstStyle/>
+          <a:p>
+            <a:endParaRPr lang="en-GB"/>
+          </a:p>
+        </p:txBody>
+      </p:sp>
+      <p:sp>
+        <p:nvSpPr>
+          <p:cNvPr id="7" name="Text 6"/>
           <p:cNvSpPr/>
           <p:nvPr/>
         </p:nvSpPr>
@@ -10867,7 +12817,7 @@
           <a:bodyPr wrap="square" lIns="0" tIns="0" rIns="0" bIns="0" rtlCol="0" anchor="ctr"/>
           <a:lstStyle/>
           <a:p>
-            <a:pPr algn="l" indent="0" marL="0">
+            <a:pPr marL="0" indent="0" algn="l">
               <a:buNone/>
             </a:pPr>
             <a:r>
@@ -11186,4 +13136,319 @@
     </a:ext>
   </a:extLst>
 </a:theme>
+</file>
+
+<file path=ppt/theme/theme2.xml><?xml version="1.0" encoding="utf-8"?>
+<a:theme xmlns:a="http://schemas.openxmlformats.org/drawingml/2006/main" name="Office Theme">
+  <a:themeElements>
+    <a:clrScheme name="Office">
+      <a:dk1>
+        <a:sysClr val="windowText" lastClr="000000"/>
+      </a:dk1>
+      <a:lt1>
+        <a:sysClr val="window" lastClr="FFFFFF"/>
+      </a:lt1>
+      <a:dk2>
+        <a:srgbClr val="0E2841"/>
+      </a:dk2>
+      <a:lt2>
+        <a:srgbClr val="E8E8E8"/>
+      </a:lt2>
+      <a:accent1>
+        <a:srgbClr val="156082"/>
+      </a:accent1>
+      <a:accent2>
+        <a:srgbClr val="E97132"/>
+      </a:accent2>
+      <a:accent3>
+        <a:srgbClr val="196B24"/>
+      </a:accent3>
+      <a:accent4>
+        <a:srgbClr val="0F9ED5"/>
+      </a:accent4>
+      <a:accent5>
+        <a:srgbClr val="A02B93"/>
+      </a:accent5>
+      <a:accent6>
+        <a:srgbClr val="4EA72E"/>
+      </a:accent6>
+      <a:hlink>
+        <a:srgbClr val="467886"/>
+      </a:hlink>
+      <a:folHlink>
+        <a:srgbClr val="96607D"/>
+      </a:folHlink>
+    </a:clrScheme>
+    <a:fontScheme name="Office">
+      <a:majorFont>
+        <a:latin typeface="Aptos Display" panose="02110004020202020204"/>
+        <a:ea typeface=""/>
+        <a:cs typeface=""/>
+        <a:font script="Jpan" typeface="游ゴシック Light"/>
+        <a:font script="Hang" typeface="맑은 고딕"/>
+        <a:font script="Hans" typeface="等线 Light"/>
+        <a:font script="Hant" typeface="新細明體"/>
+        <a:font script="Arab" typeface="Times New Roman"/>
+        <a:font script="Hebr" typeface="Times New Roman"/>
+        <a:font script="Thai" typeface="Angsana New"/>
+        <a:font script="Ethi" typeface="Nyala"/>
+        <a:font script="Beng" typeface="Vrinda"/>
+        <a:font script="Gujr" typeface="Shruti"/>
+        <a:font script="Khmr" typeface="MoolBoran"/>
+        <a:font script="Knda" typeface="Tunga"/>
+        <a:font script="Guru" typeface="Raavi"/>
+        <a:font script="Cans" typeface="Euphemia"/>
+        <a:font script="Cher" typeface="Plantagenet Cherokee"/>
+        <a:font script="Yiii" typeface="Microsoft Yi Baiti"/>
+        <a:font script="Tibt" typeface="Microsoft Himalaya"/>
+        <a:font script="Thaa" typeface="MV Boli"/>
+        <a:font script="Deva" typeface="Mangal"/>
+        <a:font script="Telu" typeface="Gautami"/>
+        <a:font script="Taml" typeface="Latha"/>
+        <a:font script="Syrc" typeface="Estrangelo Edessa"/>
+        <a:font script="Orya" typeface="Kalinga"/>
+        <a:font script="Mlym" typeface="Kartika"/>
+        <a:font script="Laoo" typeface="DokChampa"/>
+        <a:font script="Sinh" typeface="Iskoola Pota"/>
+        <a:font script="Mong" typeface="Mongolian Baiti"/>
+        <a:font script="Viet" typeface="Times New Roman"/>
+        <a:font script="Uigh" typeface="Microsoft Uighur"/>
+        <a:font script="Geor" typeface="Sylfaen"/>
+        <a:font script="Armn" typeface="Arial"/>
+        <a:font script="Bugi" typeface="Leelawadee UI"/>
+        <a:font script="Bopo" typeface="Microsoft JhengHei"/>
+        <a:font script="Java" typeface="Javanese Text"/>
+        <a:font script="Lisu" typeface="Segoe UI"/>
+        <a:font script="Mymr" typeface="Myanmar Text"/>
+        <a:font script="Nkoo" typeface="Ebrima"/>
+        <a:font script="Olck" typeface="Nirmala UI"/>
+        <a:font script="Osma" typeface="Ebrima"/>
+        <a:font script="Phag" typeface="Phagspa"/>
+        <a:font script="Syrn" typeface="Estrangelo Edessa"/>
+        <a:font script="Syrj" typeface="Estrangelo Edessa"/>
+        <a:font script="Syre" typeface="Estrangelo Edessa"/>
+        <a:font script="Sora" typeface="Nirmala UI"/>
+        <a:font script="Tale" typeface="Microsoft Tai Le"/>
+        <a:font script="Talu" typeface="Microsoft New Tai Lue"/>
+        <a:font script="Tfng" typeface="Ebrima"/>
+      </a:majorFont>
+      <a:minorFont>
+        <a:latin typeface="Aptos" panose="02110004020202020204"/>
+        <a:ea typeface=""/>
+        <a:cs typeface=""/>
+        <a:font script="Jpan" typeface="游ゴシック"/>
+        <a:font script="Hang" typeface="맑은 고딕"/>
+        <a:font script="Hans" typeface="等线"/>
+        <a:font script="Hant" typeface="新細明體"/>
+        <a:font script="Arab" typeface="Arial"/>
+        <a:font script="Hebr" typeface="Arial"/>
+        <a:font script="Thai" typeface="Cordia New"/>
+        <a:font script="Ethi" typeface="Nyala"/>
+        <a:font script="Beng" typeface="Vrinda"/>
+        <a:font script="Gujr" typeface="Shruti"/>
+        <a:font script="Khmr" typeface="DaunPenh"/>
+        <a:font script="Knda" typeface="Tunga"/>
+        <a:font script="Guru" typeface="Raavi"/>
+        <a:font script="Cans" typeface="Euphemia"/>
+        <a:font script="Cher" typeface="Plantagenet Cherokee"/>
+        <a:font script="Yiii" typeface="Microsoft Yi Baiti"/>
+        <a:font script="Tibt" typeface="Microsoft Himalaya"/>
+        <a:font script="Thaa" typeface="MV Boli"/>
+        <a:font script="Deva" typeface="Mangal"/>
+        <a:font script="Telu" typeface="Gautami"/>
+        <a:font script="Taml" typeface="Latha"/>
+        <a:font script="Syrc" typeface="Estrangelo Edessa"/>
+        <a:font script="Orya" typeface="Kalinga"/>
+        <a:font script="Mlym" typeface="Kartika"/>
+        <a:font script="Laoo" typeface="DokChampa"/>
+        <a:font script="Sinh" typeface="Iskoola Pota"/>
+        <a:font script="Mong" typeface="Mongolian Baiti"/>
+        <a:font script="Viet" typeface="Arial"/>
+        <a:font script="Uigh" typeface="Microsoft Uighur"/>
+        <a:font script="Geor" typeface="Sylfaen"/>
+        <a:font script="Armn" typeface="Arial"/>
+        <a:font script="Bugi" typeface="Leelawadee UI"/>
+        <a:font script="Bopo" typeface="Microsoft JhengHei"/>
+        <a:font script="Java" typeface="Javanese Text"/>
+        <a:font script="Lisu" typeface="Segoe UI"/>
+        <a:font script="Mymr" typeface="Myanmar Text"/>
+        <a:font script="Nkoo" typeface="Ebrima"/>
+        <a:font script="Olck" typeface="Nirmala UI"/>
+        <a:font script="Osma" typeface="Ebrima"/>
+        <a:font script="Phag" typeface="Phagspa"/>
+        <a:font script="Syrn" typeface="Estrangelo Edessa"/>
+        <a:font script="Syrj" typeface="Estrangelo Edessa"/>
+        <a:font script="Syre" typeface="Estrangelo Edessa"/>
+        <a:font script="Sora" typeface="Nirmala UI"/>
+        <a:font script="Tale" typeface="Microsoft Tai Le"/>
+        <a:font script="Talu" typeface="Microsoft New Tai Lue"/>
+        <a:font script="Tfng" typeface="Ebrima"/>
+      </a:minorFont>
+    </a:fontScheme>
+    <a:fmtScheme name="Office">
+      <a:fillStyleLst>
+        <a:solidFill>
+          <a:schemeClr val="phClr"/>
+        </a:solidFill>
+        <a:gradFill rotWithShape="1">
+          <a:gsLst>
+            <a:gs pos="0">
+              <a:schemeClr val="phClr">
+                <a:lumMod val="110000"/>
+                <a:satMod val="105000"/>
+                <a:tint val="67000"/>
+              </a:schemeClr>
+            </a:gs>
+            <a:gs pos="50000">
+              <a:schemeClr val="phClr">
+                <a:lumMod val="105000"/>
+                <a:satMod val="103000"/>
+                <a:tint val="73000"/>
+              </a:schemeClr>
+            </a:gs>
+            <a:gs pos="100000">
+              <a:schemeClr val="phClr">
+                <a:lumMod val="105000"/>
+                <a:satMod val="109000"/>
+                <a:tint val="81000"/>
+              </a:schemeClr>
+            </a:gs>
+          </a:gsLst>
+          <a:lin ang="5400000" scaled="0"/>
+        </a:gradFill>
+        <a:gradFill rotWithShape="1">
+          <a:gsLst>
+            <a:gs pos="0">
+              <a:schemeClr val="phClr">
+                <a:satMod val="103000"/>
+                <a:lumMod val="102000"/>
+                <a:tint val="94000"/>
+              </a:schemeClr>
+            </a:gs>
+            <a:gs pos="50000">
+              <a:schemeClr val="phClr">
+                <a:satMod val="110000"/>
+                <a:lumMod val="100000"/>
+                <a:shade val="100000"/>
+              </a:schemeClr>
+            </a:gs>
+            <a:gs pos="100000">
+              <a:schemeClr val="phClr">
+                <a:lumMod val="99000"/>
+                <a:satMod val="120000"/>
+                <a:shade val="78000"/>
+              </a:schemeClr>
+            </a:gs>
+          </a:gsLst>
+          <a:lin ang="5400000" scaled="0"/>
+        </a:gradFill>
+      </a:fillStyleLst>
+      <a:lnStyleLst>
+        <a:ln w="12700" cap="flat" cmpd="sng" algn="ctr">
+          <a:solidFill>
+            <a:schemeClr val="phClr"/>
+          </a:solidFill>
+          <a:prstDash val="solid"/>
+          <a:miter lim="800000"/>
+        </a:ln>
+        <a:ln w="19050" cap="flat" cmpd="sng" algn="ctr">
+          <a:solidFill>
+            <a:schemeClr val="phClr"/>
+          </a:solidFill>
+          <a:prstDash val="solid"/>
+          <a:miter lim="800000"/>
+        </a:ln>
+        <a:ln w="25400" cap="flat" cmpd="sng" algn="ctr">
+          <a:solidFill>
+            <a:schemeClr val="phClr"/>
+          </a:solidFill>
+          <a:prstDash val="solid"/>
+          <a:miter lim="800000"/>
+        </a:ln>
+      </a:lnStyleLst>
+      <a:effectStyleLst>
+        <a:effectStyle>
+          <a:effectLst/>
+        </a:effectStyle>
+        <a:effectStyle>
+          <a:effectLst/>
+        </a:effectStyle>
+        <a:effectStyle>
+          <a:effectLst>
+            <a:outerShdw blurRad="57150" dist="19050" dir="5400000" algn="ctr" rotWithShape="0">
+              <a:srgbClr val="000000">
+                <a:alpha val="63000"/>
+              </a:srgbClr>
+            </a:outerShdw>
+          </a:effectLst>
+        </a:effectStyle>
+      </a:effectStyleLst>
+      <a:bgFillStyleLst>
+        <a:solidFill>
+          <a:schemeClr val="phClr"/>
+        </a:solidFill>
+        <a:solidFill>
+          <a:schemeClr val="phClr">
+            <a:tint val="95000"/>
+            <a:satMod val="170000"/>
+          </a:schemeClr>
+        </a:solidFill>
+        <a:gradFill rotWithShape="1">
+          <a:gsLst>
+            <a:gs pos="0">
+              <a:schemeClr val="phClr">
+                <a:tint val="93000"/>
+                <a:satMod val="150000"/>
+                <a:shade val="98000"/>
+                <a:lumMod val="102000"/>
+              </a:schemeClr>
+            </a:gs>
+            <a:gs pos="50000">
+              <a:schemeClr val="phClr">
+                <a:tint val="98000"/>
+                <a:satMod val="130000"/>
+                <a:shade val="90000"/>
+                <a:lumMod val="103000"/>
+              </a:schemeClr>
+            </a:gs>
+            <a:gs pos="100000">
+              <a:schemeClr val="phClr">
+                <a:shade val="63000"/>
+                <a:satMod val="120000"/>
+              </a:schemeClr>
+            </a:gs>
+          </a:gsLst>
+          <a:lin ang="5400000" scaled="0"/>
+        </a:gradFill>
+      </a:bgFillStyleLst>
+    </a:fmtScheme>
+  </a:themeElements>
+  <a:objectDefaults>
+    <a:lnDef>
+      <a:spPr/>
+      <a:bodyPr/>
+      <a:lstStyle/>
+      <a:style>
+        <a:lnRef idx="2">
+          <a:schemeClr val="accent1"/>
+        </a:lnRef>
+        <a:fillRef idx="0">
+          <a:schemeClr val="accent1"/>
+        </a:fillRef>
+        <a:effectRef idx="1">
+          <a:schemeClr val="accent1"/>
+        </a:effectRef>
+        <a:fontRef idx="minor">
+          <a:schemeClr val="tx1"/>
+        </a:fontRef>
+      </a:style>
+    </a:lnDef>
+  </a:objectDefaults>
+  <a:extraClrSchemeLst/>
+  <a:extLst>
+    <a:ext uri="{05A4C25C-085E-4340-85A3-A5531E510DB2}">
+      <thm15:themeFamily xmlns:thm15="http://schemas.microsoft.com/office/thememl/2012/main" name="Office Theme" id="{2E142A2C-CD16-42D6-873A-C26D2A0506FA}" vid="{1BDDFF52-6CD6-40A5-AB3C-68EB2F1E4D0A}"/>
+    </a:ext>
+  </a:extLst>
+</a:theme>
 </file>